--- a/Requirement to CAPL Generator.pptx
+++ b/Requirement to CAPL Generator.pptx
@@ -5,12 +5,12 @@
     <p:sldMasterId id="2147483648" r:id="rId1"/>
   </p:sldMasterIdLst>
   <p:sldIdLst>
-    <p:sldId id="261" r:id="rId2"/>
+    <p:sldId id="262" r:id="rId2"/>
     <p:sldId id="257" r:id="rId3"/>
     <p:sldId id="258" r:id="rId4"/>
     <p:sldId id="259" r:id="rId5"/>
-    <p:sldId id="260" r:id="rId6"/>
-    <p:sldId id="262" r:id="rId7"/>
+    <p:sldId id="261" r:id="rId6"/>
+    <p:sldId id="263" r:id="rId7"/>
   </p:sldIdLst>
   <p:sldSz cx="12192000" cy="6858000"/>
   <p:notesSz cx="6858000" cy="9144000"/>
@@ -266,7 +266,7 @@
           <a:p>
             <a:fld id="{36C57949-E15D-4576-A15E-9E54D6417418}" type="datetimeFigureOut">
               <a:rPr lang="en-IN" smtClean="0"/>
-              <a:t>10-06-2026</a:t>
+              <a:t>18-09-2026</a:t>
             </a:fld>
             <a:endParaRPr lang="en-IN"/>
           </a:p>
@@ -466,7 +466,7 @@
           <a:p>
             <a:fld id="{36C57949-E15D-4576-A15E-9E54D6417418}" type="datetimeFigureOut">
               <a:rPr lang="en-IN" smtClean="0"/>
-              <a:t>10-06-2026</a:t>
+              <a:t>18-09-2026</a:t>
             </a:fld>
             <a:endParaRPr lang="en-IN"/>
           </a:p>
@@ -676,7 +676,7 @@
           <a:p>
             <a:fld id="{36C57949-E15D-4576-A15E-9E54D6417418}" type="datetimeFigureOut">
               <a:rPr lang="en-IN" smtClean="0"/>
-              <a:t>10-06-2026</a:t>
+              <a:t>18-09-2026</a:t>
             </a:fld>
             <a:endParaRPr lang="en-IN"/>
           </a:p>
@@ -876,7 +876,7 @@
           <a:p>
             <a:fld id="{36C57949-E15D-4576-A15E-9E54D6417418}" type="datetimeFigureOut">
               <a:rPr lang="en-IN" smtClean="0"/>
-              <a:t>10-06-2026</a:t>
+              <a:t>18-09-2026</a:t>
             </a:fld>
             <a:endParaRPr lang="en-IN"/>
           </a:p>
@@ -1152,7 +1152,7 @@
           <a:p>
             <a:fld id="{36C57949-E15D-4576-A15E-9E54D6417418}" type="datetimeFigureOut">
               <a:rPr lang="en-IN" smtClean="0"/>
-              <a:t>10-06-2026</a:t>
+              <a:t>18-09-2026</a:t>
             </a:fld>
             <a:endParaRPr lang="en-IN"/>
           </a:p>
@@ -1420,7 +1420,7 @@
           <a:p>
             <a:fld id="{36C57949-E15D-4576-A15E-9E54D6417418}" type="datetimeFigureOut">
               <a:rPr lang="en-IN" smtClean="0"/>
-              <a:t>10-06-2026</a:t>
+              <a:t>18-09-2026</a:t>
             </a:fld>
             <a:endParaRPr lang="en-IN"/>
           </a:p>
@@ -1835,7 +1835,7 @@
           <a:p>
             <a:fld id="{36C57949-E15D-4576-A15E-9E54D6417418}" type="datetimeFigureOut">
               <a:rPr lang="en-IN" smtClean="0"/>
-              <a:t>10-06-2026</a:t>
+              <a:t>18-09-2026</a:t>
             </a:fld>
             <a:endParaRPr lang="en-IN"/>
           </a:p>
@@ -1977,7 +1977,7 @@
           <a:p>
             <a:fld id="{36C57949-E15D-4576-A15E-9E54D6417418}" type="datetimeFigureOut">
               <a:rPr lang="en-IN" smtClean="0"/>
-              <a:t>10-06-2026</a:t>
+              <a:t>18-09-2026</a:t>
             </a:fld>
             <a:endParaRPr lang="en-IN"/>
           </a:p>
@@ -2090,7 +2090,7 @@
           <a:p>
             <a:fld id="{36C57949-E15D-4576-A15E-9E54D6417418}" type="datetimeFigureOut">
               <a:rPr lang="en-IN" smtClean="0"/>
-              <a:t>10-06-2026</a:t>
+              <a:t>18-09-2026</a:t>
             </a:fld>
             <a:endParaRPr lang="en-IN"/>
           </a:p>
@@ -2403,7 +2403,7 @@
           <a:p>
             <a:fld id="{36C57949-E15D-4576-A15E-9E54D6417418}" type="datetimeFigureOut">
               <a:rPr lang="en-IN" smtClean="0"/>
-              <a:t>10-06-2026</a:t>
+              <a:t>18-09-2026</a:t>
             </a:fld>
             <a:endParaRPr lang="en-IN"/>
           </a:p>
@@ -2692,7 +2692,7 @@
           <a:p>
             <a:fld id="{36C57949-E15D-4576-A15E-9E54D6417418}" type="datetimeFigureOut">
               <a:rPr lang="en-IN" smtClean="0"/>
-              <a:t>10-06-2026</a:t>
+              <a:t>18-09-2026</a:t>
             </a:fld>
             <a:endParaRPr lang="en-IN"/>
           </a:p>
@@ -2935,7 +2935,7 @@
           <a:p>
             <a:fld id="{36C57949-E15D-4576-A15E-9E54D6417418}" type="datetimeFigureOut">
               <a:rPr lang="en-IN" smtClean="0"/>
-              <a:t>10-06-2026</a:t>
+              <a:t>18-09-2026</a:t>
             </a:fld>
             <a:endParaRPr lang="en-IN"/>
           </a:p>
@@ -3497,7 +3497,7 @@
         </p:nvSpPr>
         <p:spPr>
           <a:xfrm>
-            <a:off x="786585" y="3298803"/>
+            <a:off x="78660" y="3174374"/>
             <a:ext cx="1703438" cy="923330"/>
           </a:xfrm>
           <a:prstGeom prst="rect">
@@ -3642,7 +3642,7 @@
           <a:lstStyle/>
           <a:p>
             <a:r>
-              <a:rPr lang="en-IN" dirty="0"/>
+              <a:rPr lang="en-IN" dirty="0" err="1"/>
               <a:t>ChromaDB</a:t>
             </a:r>
             <a:br>
@@ -3669,8 +3669,8 @@
         </p:nvSpPr>
         <p:spPr>
           <a:xfrm>
-            <a:off x="667368" y="2061901"/>
-            <a:ext cx="1822655" cy="1077218"/>
+            <a:off x="768149" y="1777026"/>
+            <a:ext cx="1703439" cy="1323439"/>
           </a:xfrm>
           <a:prstGeom prst="rect">
             <a:avLst/>
@@ -3712,8 +3712,8 @@
         </p:nvCxnSpPr>
         <p:spPr>
           <a:xfrm>
-            <a:off x="2490023" y="2600510"/>
-            <a:ext cx="1979967" cy="0"/>
+            <a:off x="2471588" y="2438746"/>
+            <a:ext cx="2054935" cy="7367"/>
           </a:xfrm>
           <a:prstGeom prst="straightConnector1">
             <a:avLst/>
@@ -3783,50 +3783,6 @@
           </a:p>
         </p:txBody>
       </p:sp>
-      <p:cxnSp>
-        <p:nvCxnSpPr>
-          <p:cNvPr id="11" name="Straight Arrow Connector 10">
-            <a:extLst>
-              <a:ext uri="{FF2B5EF4-FFF2-40B4-BE49-F238E27FC236}">
-                <a16:creationId xmlns:a16="http://schemas.microsoft.com/office/drawing/2014/main" id="{F5C47D66-7226-175E-320A-7CC6756B7497}"/>
-              </a:ext>
-            </a:extLst>
-          </p:cNvPr>
-          <p:cNvCxnSpPr>
-            <a:cxnSpLocks/>
-          </p:cNvCxnSpPr>
-          <p:nvPr/>
-        </p:nvCxnSpPr>
-        <p:spPr>
-          <a:xfrm>
-            <a:off x="2490023" y="3539613"/>
-            <a:ext cx="1998402" cy="0"/>
-          </a:xfrm>
-          <a:prstGeom prst="straightConnector1">
-            <a:avLst/>
-          </a:prstGeom>
-          <a:ln>
-            <a:solidFill>
-              <a:schemeClr val="tx1"/>
-            </a:solidFill>
-            <a:tailEnd type="triangle"/>
-          </a:ln>
-        </p:spPr>
-        <p:style>
-          <a:lnRef idx="1">
-            <a:schemeClr val="accent1"/>
-          </a:lnRef>
-          <a:fillRef idx="0">
-            <a:schemeClr val="accent1"/>
-          </a:fillRef>
-          <a:effectRef idx="0">
-            <a:schemeClr val="accent1"/>
-          </a:effectRef>
-          <a:fontRef idx="minor">
-            <a:schemeClr val="tx1"/>
-          </a:fontRef>
-        </p:style>
-      </p:cxnSp>
       <p:cxnSp>
         <p:nvCxnSpPr>
           <p:cNvPr id="17" name="Straight Arrow Connector 16">
@@ -4133,10 +4089,10 @@
       </p:cxnSp>
       <p:sp>
         <p:nvSpPr>
-          <p:cNvPr id="45" name="TextBox 44">
-            <a:extLst>
-              <a:ext uri="{FF2B5EF4-FFF2-40B4-BE49-F238E27FC236}">
-                <a16:creationId xmlns:a16="http://schemas.microsoft.com/office/drawing/2014/main" id="{1674CD1B-BC87-4E09-84DE-575A004D633F}"/>
+          <p:cNvPr id="44" name="TextBox 43">
+            <a:extLst>
+              <a:ext uri="{FF2B5EF4-FFF2-40B4-BE49-F238E27FC236}">
+                <a16:creationId xmlns:a16="http://schemas.microsoft.com/office/drawing/2014/main" id="{BBB39B42-0D1D-00E4-23DE-086FEB7F1240}"/>
               </a:ext>
             </a:extLst>
           </p:cNvPr>
@@ -4145,8 +4101,8 @@
         </p:nvSpPr>
         <p:spPr>
           <a:xfrm>
-            <a:off x="2516754" y="3298767"/>
-            <a:ext cx="1579922" cy="246221"/>
+            <a:off x="2746273" y="2153393"/>
+            <a:ext cx="1308923" cy="246221"/>
           </a:xfrm>
           <a:prstGeom prst="rect">
             <a:avLst/>
@@ -4161,17 +4117,17 @@
           <a:p>
             <a:r>
               <a:rPr lang="en-IN" sz="1000" dirty="0"/>
-              <a:t>CAPL Generation [Input-1]</a:t>
-            </a:r>
-          </a:p>
-        </p:txBody>
-      </p:sp>
-      <p:sp>
-        <p:nvSpPr>
-          <p:cNvPr id="52" name="TextBox 51">
-            <a:extLst>
-              <a:ext uri="{FF2B5EF4-FFF2-40B4-BE49-F238E27FC236}">
-                <a16:creationId xmlns:a16="http://schemas.microsoft.com/office/drawing/2014/main" id="{1BA287D0-D968-96E7-84F0-FDE15B591CE9}"/>
+              <a:t>Test Spec Generation</a:t>
+            </a:r>
+          </a:p>
+        </p:txBody>
+      </p:sp>
+      <p:sp>
+        <p:nvSpPr>
+          <p:cNvPr id="45" name="TextBox 44">
+            <a:extLst>
+              <a:ext uri="{FF2B5EF4-FFF2-40B4-BE49-F238E27FC236}">
+                <a16:creationId xmlns:a16="http://schemas.microsoft.com/office/drawing/2014/main" id="{1674CD1B-BC87-4E09-84DE-575A004D633F}"/>
               </a:ext>
             </a:extLst>
           </p:cNvPr>
@@ -4180,7 +4136,7 @@
         </p:nvSpPr>
         <p:spPr>
           <a:xfrm>
-            <a:off x="2757640" y="4887761"/>
+            <a:off x="-51002" y="4180995"/>
             <a:ext cx="1579922" cy="246221"/>
           </a:xfrm>
           <a:prstGeom prst="rect">
@@ -4196,17 +4152,17 @@
           <a:p>
             <a:r>
               <a:rPr lang="en-IN" sz="1000" dirty="0"/>
-              <a:t>CAPL Generation [Input-2]</a:t>
-            </a:r>
-          </a:p>
-        </p:txBody>
-      </p:sp>
-      <p:sp>
-        <p:nvSpPr>
-          <p:cNvPr id="53" name="TextBox 52">
-            <a:extLst>
-              <a:ext uri="{FF2B5EF4-FFF2-40B4-BE49-F238E27FC236}">
-                <a16:creationId xmlns:a16="http://schemas.microsoft.com/office/drawing/2014/main" id="{016DE89D-3E63-365E-6771-E3E101EBE2B5}"/>
+              <a:t>CAPL Generation [Input-1]</a:t>
+            </a:r>
+          </a:p>
+        </p:txBody>
+      </p:sp>
+      <p:sp>
+        <p:nvSpPr>
+          <p:cNvPr id="52" name="TextBox 51">
+            <a:extLst>
+              <a:ext uri="{FF2B5EF4-FFF2-40B4-BE49-F238E27FC236}">
+                <a16:creationId xmlns:a16="http://schemas.microsoft.com/office/drawing/2014/main" id="{1BA287D0-D968-96E7-84F0-FDE15B591CE9}"/>
               </a:ext>
             </a:extLst>
           </p:cNvPr>
@@ -4215,7 +4171,7 @@
         </p:nvSpPr>
         <p:spPr>
           <a:xfrm>
-            <a:off x="2757640" y="5281802"/>
+            <a:off x="2757640" y="4887761"/>
             <a:ext cx="1579922" cy="246221"/>
           </a:xfrm>
           <a:prstGeom prst="rect">
@@ -4231,17 +4187,17 @@
           <a:p>
             <a:r>
               <a:rPr lang="en-IN" sz="1000" dirty="0"/>
-              <a:t>CAPL Generation [Input-3]</a:t>
-            </a:r>
-          </a:p>
-        </p:txBody>
-      </p:sp>
-      <p:sp>
-        <p:nvSpPr>
-          <p:cNvPr id="54" name="TextBox 53">
-            <a:extLst>
-              <a:ext uri="{FF2B5EF4-FFF2-40B4-BE49-F238E27FC236}">
-                <a16:creationId xmlns:a16="http://schemas.microsoft.com/office/drawing/2014/main" id="{DDE1175D-6C4E-B364-8E08-6C218A00655D}"/>
+              <a:t>CAPL Generation [Input-2]</a:t>
+            </a:r>
+          </a:p>
+        </p:txBody>
+      </p:sp>
+      <p:sp>
+        <p:nvSpPr>
+          <p:cNvPr id="53" name="TextBox 52">
+            <a:extLst>
+              <a:ext uri="{FF2B5EF4-FFF2-40B4-BE49-F238E27FC236}">
+                <a16:creationId xmlns:a16="http://schemas.microsoft.com/office/drawing/2014/main" id="{016DE89D-3E63-365E-6771-E3E101EBE2B5}"/>
               </a:ext>
             </a:extLst>
           </p:cNvPr>
@@ -4250,8 +4206,8 @@
         </p:nvSpPr>
         <p:spPr>
           <a:xfrm>
-            <a:off x="2807720" y="4169860"/>
-            <a:ext cx="1718803" cy="400110"/>
+            <a:off x="2757640" y="5281802"/>
+            <a:ext cx="1579922" cy="246221"/>
           </a:xfrm>
           <a:prstGeom prst="rect">
             <a:avLst/>
@@ -4266,7 +4222,165 @@
           <a:p>
             <a:r>
               <a:rPr lang="en-IN" sz="1000" dirty="0"/>
-              <a:t>DB Generation Automatically – If not generated</a:t>
+              <a:t>CAPL Generation [Input-3]</a:t>
+            </a:r>
+          </a:p>
+        </p:txBody>
+      </p:sp>
+      <p:sp>
+        <p:nvSpPr>
+          <p:cNvPr id="54" name="TextBox 53">
+            <a:extLst>
+              <a:ext uri="{FF2B5EF4-FFF2-40B4-BE49-F238E27FC236}">
+                <a16:creationId xmlns:a16="http://schemas.microsoft.com/office/drawing/2014/main" id="{DDE1175D-6C4E-B364-8E08-6C218A00655D}"/>
+              </a:ext>
+            </a:extLst>
+          </p:cNvPr>
+          <p:cNvSpPr txBox="1"/>
+          <p:nvPr/>
+        </p:nvSpPr>
+        <p:spPr>
+          <a:xfrm>
+            <a:off x="2807720" y="4169860"/>
+            <a:ext cx="1718803" cy="400110"/>
+          </a:xfrm>
+          <a:prstGeom prst="rect">
+            <a:avLst/>
+          </a:prstGeom>
+          <a:noFill/>
+        </p:spPr>
+        <p:txBody>
+          <a:bodyPr wrap="square" rtlCol="0">
+            <a:spAutoFit/>
+          </a:bodyPr>
+          <a:lstStyle/>
+          <a:p>
+            <a:r>
+              <a:rPr lang="en-IN" sz="1000" dirty="0"/>
+              <a:t>Automatic DB Generation– If not available</a:t>
+            </a:r>
+          </a:p>
+        </p:txBody>
+      </p:sp>
+      <p:cxnSp>
+        <p:nvCxnSpPr>
+          <p:cNvPr id="10" name="Straight Arrow Connector 9">
+            <a:extLst>
+              <a:ext uri="{FF2B5EF4-FFF2-40B4-BE49-F238E27FC236}">
+                <a16:creationId xmlns:a16="http://schemas.microsoft.com/office/drawing/2014/main" id="{88C2A2B0-90AF-D541-1A79-CC5749F7B0F6}"/>
+              </a:ext>
+            </a:extLst>
+          </p:cNvPr>
+          <p:cNvCxnSpPr>
+            <a:stCxn id="3" idx="2"/>
+          </p:cNvCxnSpPr>
+          <p:nvPr/>
+        </p:nvCxnSpPr>
+        <p:spPr>
+          <a:xfrm>
+            <a:off x="930379" y="4097704"/>
+            <a:ext cx="937750" cy="272211"/>
+          </a:xfrm>
+          <a:prstGeom prst="straightConnector1">
+            <a:avLst/>
+          </a:prstGeom>
+          <a:ln>
+            <a:tailEnd type="triangle"/>
+          </a:ln>
+        </p:spPr>
+        <p:style>
+          <a:lnRef idx="1">
+            <a:schemeClr val="dk1"/>
+          </a:lnRef>
+          <a:fillRef idx="0">
+            <a:schemeClr val="dk1"/>
+          </a:fillRef>
+          <a:effectRef idx="0">
+            <a:schemeClr val="dk1"/>
+          </a:effectRef>
+          <a:fontRef idx="minor">
+            <a:schemeClr val="tx1"/>
+          </a:fontRef>
+        </p:style>
+      </p:cxnSp>
+      <p:cxnSp>
+        <p:nvCxnSpPr>
+          <p:cNvPr id="24" name="Connector: Elbow 23">
+            <a:extLst>
+              <a:ext uri="{FF2B5EF4-FFF2-40B4-BE49-F238E27FC236}">
+                <a16:creationId xmlns:a16="http://schemas.microsoft.com/office/drawing/2014/main" id="{0099E425-8A16-8269-0112-2FF822EFA5A5}"/>
+              </a:ext>
+            </a:extLst>
+          </p:cNvPr>
+          <p:cNvCxnSpPr>
+            <a:stCxn id="18" idx="3"/>
+            <a:endCxn id="5" idx="1"/>
+          </p:cNvCxnSpPr>
+          <p:nvPr/>
+        </p:nvCxnSpPr>
+        <p:spPr>
+          <a:xfrm flipH="1">
+            <a:off x="1359925" y="4533819"/>
+            <a:ext cx="8866850" cy="318191"/>
+          </a:xfrm>
+          <a:prstGeom prst="bentConnector5">
+            <a:avLst>
+              <a:gd name="adj1" fmla="val -11893"/>
+              <a:gd name="adj2" fmla="val 610488"/>
+              <a:gd name="adj3" fmla="val 102578"/>
+            </a:avLst>
+          </a:prstGeom>
+          <a:ln>
+            <a:prstDash val="dash"/>
+            <a:tailEnd type="triangle"/>
+          </a:ln>
+        </p:spPr>
+        <p:style>
+          <a:lnRef idx="1">
+            <a:schemeClr val="dk1"/>
+          </a:lnRef>
+          <a:fillRef idx="0">
+            <a:schemeClr val="dk1"/>
+          </a:fillRef>
+          <a:effectRef idx="0">
+            <a:schemeClr val="dk1"/>
+          </a:effectRef>
+          <a:fontRef idx="minor">
+            <a:schemeClr val="tx1"/>
+          </a:fontRef>
+        </p:style>
+      </p:cxnSp>
+      <p:sp>
+        <p:nvSpPr>
+          <p:cNvPr id="29" name="TextBox 28">
+            <a:extLst>
+              <a:ext uri="{FF2B5EF4-FFF2-40B4-BE49-F238E27FC236}">
+                <a16:creationId xmlns:a16="http://schemas.microsoft.com/office/drawing/2014/main" id="{A36C9885-230A-4F98-0E56-8ED1694DAF25}"/>
+              </a:ext>
+            </a:extLst>
+          </p:cNvPr>
+          <p:cNvSpPr txBox="1"/>
+          <p:nvPr/>
+        </p:nvSpPr>
+        <p:spPr>
+          <a:xfrm>
+            <a:off x="195726" y="4887761"/>
+            <a:ext cx="1054508" cy="553998"/>
+          </a:xfrm>
+          <a:prstGeom prst="rect">
+            <a:avLst/>
+          </a:prstGeom>
+          <a:noFill/>
+        </p:spPr>
+        <p:txBody>
+          <a:bodyPr wrap="square" rtlCol="0">
+            <a:spAutoFit/>
+          </a:bodyPr>
+          <a:lstStyle/>
+          <a:p>
+            <a:r>
+              <a:rPr lang="en-IN" sz="1000" dirty="0"/>
+              <a:t>Examples addition from past generation</a:t>
             </a:r>
           </a:p>
         </p:txBody>
@@ -4276,7 +4390,7 @@
           <p:cNvPr id="7" name="TextBox 6">
             <a:extLst>
               <a:ext uri="{FF2B5EF4-FFF2-40B4-BE49-F238E27FC236}">
-                <a16:creationId xmlns:a16="http://schemas.microsoft.com/office/drawing/2014/main" id="{BFB3FD3C-F1C0-BA94-23B8-1F21C8A7B8ED}"/>
+                <a16:creationId xmlns:a16="http://schemas.microsoft.com/office/drawing/2014/main" id="{D8DC8BA0-28D9-2B88-76D5-81FDC4A27FE7}"/>
               </a:ext>
             </a:extLst>
           </p:cNvPr>
@@ -4285,7 +4399,7 @@
         </p:nvSpPr>
         <p:spPr>
           <a:xfrm>
-            <a:off x="668594" y="1585666"/>
+            <a:off x="705465" y="1361195"/>
             <a:ext cx="1822656" cy="369332"/>
           </a:xfrm>
           <a:prstGeom prst="rect">
@@ -4313,10 +4427,10 @@
       </p:sp>
       <p:cxnSp>
         <p:nvCxnSpPr>
-          <p:cNvPr id="12" name="Straight Arrow Connector 11">
-            <a:extLst>
-              <a:ext uri="{FF2B5EF4-FFF2-40B4-BE49-F238E27FC236}">
-                <a16:creationId xmlns:a16="http://schemas.microsoft.com/office/drawing/2014/main" id="{25507541-0699-8BC2-60A9-B87B58BED1FC}"/>
+          <p:cNvPr id="11" name="Straight Arrow Connector 10">
+            <a:extLst>
+              <a:ext uri="{FF2B5EF4-FFF2-40B4-BE49-F238E27FC236}">
+                <a16:creationId xmlns:a16="http://schemas.microsoft.com/office/drawing/2014/main" id="{545F4302-4D29-542D-A3B4-05FE83D37287}"/>
               </a:ext>
             </a:extLst>
           </p:cNvPr>
@@ -4328,7 +4442,7 @@
         </p:nvCxnSpPr>
         <p:spPr>
           <a:xfrm>
-            <a:off x="2491250" y="1770332"/>
+            <a:off x="2528121" y="1545861"/>
             <a:ext cx="1978740" cy="0"/>
           </a:xfrm>
           <a:prstGeom prst="straightConnector1">
@@ -4355,10 +4469,10 @@
       </p:cxnSp>
       <p:sp>
         <p:nvSpPr>
-          <p:cNvPr id="23" name="TextBox 22">
-            <a:extLst>
-              <a:ext uri="{FF2B5EF4-FFF2-40B4-BE49-F238E27FC236}">
-                <a16:creationId xmlns:a16="http://schemas.microsoft.com/office/drawing/2014/main" id="{17FCB8AC-80FB-7119-9C50-01ED77BCFC6B}"/>
+          <p:cNvPr id="12" name="TextBox 11">
+            <a:extLst>
+              <a:ext uri="{FF2B5EF4-FFF2-40B4-BE49-F238E27FC236}">
+                <a16:creationId xmlns:a16="http://schemas.microsoft.com/office/drawing/2014/main" id="{BCA014A1-782C-B01E-2D31-CD6F6D50715F}"/>
               </a:ext>
             </a:extLst>
           </p:cNvPr>
@@ -4367,7 +4481,7 @@
         </p:nvSpPr>
         <p:spPr>
           <a:xfrm>
-            <a:off x="2546557" y="1522979"/>
+            <a:off x="2686356" y="1250440"/>
             <a:ext cx="1923433" cy="246221"/>
           </a:xfrm>
           <a:prstGeom prst="rect">
@@ -4383,42 +4497,7 @@
           <a:p>
             <a:r>
               <a:rPr lang="en-IN" sz="1000" dirty="0"/>
-              <a:t>Test Spec Generation [Input - 1]</a:t>
-            </a:r>
-          </a:p>
-        </p:txBody>
-      </p:sp>
-      <p:sp>
-        <p:nvSpPr>
-          <p:cNvPr id="24" name="TextBox 23">
-            <a:extLst>
-              <a:ext uri="{FF2B5EF4-FFF2-40B4-BE49-F238E27FC236}">
-                <a16:creationId xmlns:a16="http://schemas.microsoft.com/office/drawing/2014/main" id="{34D7932E-EA10-ED54-07EA-69C2AC943831}"/>
-              </a:ext>
-            </a:extLst>
-          </p:cNvPr>
-          <p:cNvSpPr txBox="1"/>
-          <p:nvPr/>
-        </p:nvSpPr>
-        <p:spPr>
-          <a:xfrm>
-            <a:off x="2501390" y="2333272"/>
-            <a:ext cx="1923433" cy="246221"/>
-          </a:xfrm>
-          <a:prstGeom prst="rect">
-            <a:avLst/>
-          </a:prstGeom>
-          <a:noFill/>
-        </p:spPr>
-        <p:txBody>
-          <a:bodyPr wrap="square" rtlCol="0">
-            <a:spAutoFit/>
-          </a:bodyPr>
-          <a:lstStyle/>
-          <a:p>
-            <a:r>
-              <a:rPr lang="en-IN" sz="1000" dirty="0"/>
-              <a:t>Test Spec Generation [Input - 2]</a:t>
+              <a:t>Test Spec Generation</a:t>
             </a:r>
           </a:p>
         </p:txBody>
@@ -4506,7 +4585,7 @@
         </p:nvSpPr>
         <p:spPr>
           <a:xfrm>
-            <a:off x="786585" y="3180816"/>
+            <a:off x="495381" y="3198910"/>
             <a:ext cx="1703438" cy="923330"/>
           </a:xfrm>
           <a:prstGeom prst="rect">
@@ -4648,7 +4727,7 @@
           <a:lstStyle/>
           <a:p>
             <a:r>
-              <a:rPr lang="en-IN" dirty="0"/>
+              <a:rPr lang="en-IN" dirty="0" err="1"/>
               <a:t>ChromaDB</a:t>
             </a:r>
             <a:br>
@@ -4663,10 +4742,10 @@
       </p:sp>
       <p:sp>
         <p:nvSpPr>
-          <p:cNvPr id="9" name="TextBox 8">
-            <a:extLst>
-              <a:ext uri="{FF2B5EF4-FFF2-40B4-BE49-F238E27FC236}">
-                <a16:creationId xmlns:a16="http://schemas.microsoft.com/office/drawing/2014/main" id="{68F19B5A-3016-4EE6-3E6E-B51BEAC2785A}"/>
+          <p:cNvPr id="6" name="TextBox 5">
+            <a:extLst>
+              <a:ext uri="{FF2B5EF4-FFF2-40B4-BE49-F238E27FC236}">
+                <a16:creationId xmlns:a16="http://schemas.microsoft.com/office/drawing/2014/main" id="{FCD41ADF-1952-3A47-8890-035F24ABD9F1}"/>
               </a:ext>
             </a:extLst>
           </p:cNvPr>
@@ -4675,8 +4754,8 @@
         </p:nvSpPr>
         <p:spPr>
           <a:xfrm>
-            <a:off x="8230827" y="1376251"/>
-            <a:ext cx="1995948" cy="1200329"/>
+            <a:off x="786584" y="1462172"/>
+            <a:ext cx="1703439" cy="1477328"/>
           </a:xfrm>
           <a:prstGeom prst="rect">
             <a:avLst/>
@@ -4694,6 +4773,88 @@
           </a:bodyPr>
           <a:lstStyle/>
           <a:p>
+            <a:r>
+              <a:rPr lang="en-IN" dirty="0"/>
+              <a:t>System Prompts (Bootloader, UDS, Vehicle Communication,…)</a:t>
+            </a:r>
+          </a:p>
+        </p:txBody>
+      </p:sp>
+      <p:cxnSp>
+        <p:nvCxnSpPr>
+          <p:cNvPr id="8" name="Straight Arrow Connector 7">
+            <a:extLst>
+              <a:ext uri="{FF2B5EF4-FFF2-40B4-BE49-F238E27FC236}">
+                <a16:creationId xmlns:a16="http://schemas.microsoft.com/office/drawing/2014/main" id="{AE3E70E6-C675-5578-DDCB-CA7D33E8E447}"/>
+              </a:ext>
+            </a:extLst>
+          </p:cNvPr>
+          <p:cNvCxnSpPr>
+            <a:cxnSpLocks/>
+            <a:stCxn id="6" idx="3"/>
+          </p:cNvCxnSpPr>
+          <p:nvPr/>
+        </p:nvCxnSpPr>
+        <p:spPr>
+          <a:xfrm>
+            <a:off x="2490023" y="2200836"/>
+            <a:ext cx="1998402" cy="0"/>
+          </a:xfrm>
+          <a:prstGeom prst="straightConnector1">
+            <a:avLst/>
+          </a:prstGeom>
+          <a:ln>
+            <a:tailEnd type="triangle"/>
+          </a:ln>
+        </p:spPr>
+        <p:style>
+          <a:lnRef idx="1">
+            <a:schemeClr val="dk1"/>
+          </a:lnRef>
+          <a:fillRef idx="0">
+            <a:schemeClr val="dk1"/>
+          </a:fillRef>
+          <a:effectRef idx="0">
+            <a:schemeClr val="dk1"/>
+          </a:effectRef>
+          <a:fontRef idx="minor">
+            <a:schemeClr val="tx1"/>
+          </a:fontRef>
+        </p:style>
+      </p:cxnSp>
+      <p:sp>
+        <p:nvSpPr>
+          <p:cNvPr id="9" name="TextBox 8">
+            <a:extLst>
+              <a:ext uri="{FF2B5EF4-FFF2-40B4-BE49-F238E27FC236}">
+                <a16:creationId xmlns:a16="http://schemas.microsoft.com/office/drawing/2014/main" id="{68F19B5A-3016-4EE6-3E6E-B51BEAC2785A}"/>
+              </a:ext>
+            </a:extLst>
+          </p:cNvPr>
+          <p:cNvSpPr txBox="1"/>
+          <p:nvPr/>
+        </p:nvSpPr>
+        <p:spPr>
+          <a:xfrm>
+            <a:off x="8230827" y="1376251"/>
+            <a:ext cx="1995948" cy="1200329"/>
+          </a:xfrm>
+          <a:prstGeom prst="rect">
+            <a:avLst/>
+          </a:prstGeom>
+          <a:noFill/>
+          <a:ln>
+            <a:solidFill>
+              <a:schemeClr val="tx1"/>
+            </a:solidFill>
+          </a:ln>
+        </p:spPr>
+        <p:txBody>
+          <a:bodyPr wrap="square" rtlCol="0">
+            <a:spAutoFit/>
+          </a:bodyPr>
+          <a:lstStyle/>
+          <a:p>
             <a:endParaRPr lang="en-IN" dirty="0"/>
           </a:p>
           <a:p>
@@ -4718,13 +4879,14 @@
           </p:cNvPr>
           <p:cNvCxnSpPr>
             <a:cxnSpLocks/>
+            <a:stCxn id="3" idx="3"/>
           </p:cNvCxnSpPr>
           <p:nvPr/>
         </p:nvCxnSpPr>
         <p:spPr>
           <a:xfrm>
-            <a:off x="2490023" y="3421626"/>
-            <a:ext cx="1998402" cy="0"/>
+            <a:off x="2198819" y="3660575"/>
+            <a:ext cx="218414" cy="630150"/>
           </a:xfrm>
           <a:prstGeom prst="straightConnector1">
             <a:avLst/>
@@ -5057,6 +5219,41 @@
       </p:cxnSp>
       <p:sp>
         <p:nvSpPr>
+          <p:cNvPr id="44" name="TextBox 43">
+            <a:extLst>
+              <a:ext uri="{FF2B5EF4-FFF2-40B4-BE49-F238E27FC236}">
+                <a16:creationId xmlns:a16="http://schemas.microsoft.com/office/drawing/2014/main" id="{C3103988-96D3-2549-8C86-74B60FEDFE53}"/>
+              </a:ext>
+            </a:extLst>
+          </p:cNvPr>
+          <p:cNvSpPr txBox="1"/>
+          <p:nvPr/>
+        </p:nvSpPr>
+        <p:spPr>
+          <a:xfrm>
+            <a:off x="2746273" y="1976415"/>
+            <a:ext cx="1308923" cy="246221"/>
+          </a:xfrm>
+          <a:prstGeom prst="rect">
+            <a:avLst/>
+          </a:prstGeom>
+          <a:noFill/>
+        </p:spPr>
+        <p:txBody>
+          <a:bodyPr wrap="square" rtlCol="0">
+            <a:spAutoFit/>
+          </a:bodyPr>
+          <a:lstStyle/>
+          <a:p>
+            <a:r>
+              <a:rPr lang="en-IN" sz="1000" dirty="0"/>
+              <a:t>Test Spec Generation</a:t>
+            </a:r>
+          </a:p>
+        </p:txBody>
+      </p:sp>
+      <p:sp>
+        <p:nvSpPr>
           <p:cNvPr id="45" name="TextBox 44">
             <a:extLst>
               <a:ext uri="{FF2B5EF4-FFF2-40B4-BE49-F238E27FC236}">
@@ -5453,7 +5650,7 @@
           <p:cNvPr id="10" name="TextBox 9">
             <a:extLst>
               <a:ext uri="{FF2B5EF4-FFF2-40B4-BE49-F238E27FC236}">
-                <a16:creationId xmlns:a16="http://schemas.microsoft.com/office/drawing/2014/main" id="{2C328022-3A42-8228-EDE4-F609FAF8F93E}"/>
+                <a16:creationId xmlns:a16="http://schemas.microsoft.com/office/drawing/2014/main" id="{167EDE44-0F75-7A1D-432F-CA04784733D4}"/>
               </a:ext>
             </a:extLst>
           </p:cNvPr>
@@ -5462,8 +5659,8 @@
         </p:nvSpPr>
         <p:spPr>
           <a:xfrm>
-            <a:off x="480553" y="1894754"/>
-            <a:ext cx="1822655" cy="1077218"/>
+            <a:off x="705465" y="1046563"/>
+            <a:ext cx="1822656" cy="369332"/>
           </a:xfrm>
           <a:prstGeom prst="rect">
             <a:avLst/>
@@ -5482,138 +5679,31 @@
           <a:lstStyle/>
           <a:p>
             <a:r>
-              <a:rPr lang="en-IN" sz="1600" dirty="0"/>
-              <a:t>System Prompts (Bootloader, UDS, Vehicle Communication,…)</a:t>
-            </a:r>
-          </a:p>
-        </p:txBody>
-      </p:sp>
-      <p:sp>
-        <p:nvSpPr>
-          <p:cNvPr id="14" name="TextBox 13">
-            <a:extLst>
-              <a:ext uri="{FF2B5EF4-FFF2-40B4-BE49-F238E27FC236}">
-                <a16:creationId xmlns:a16="http://schemas.microsoft.com/office/drawing/2014/main" id="{C522D9D7-0ECF-70C4-AB39-0BAB362E029F}"/>
-              </a:ext>
-            </a:extLst>
-          </p:cNvPr>
-          <p:cNvSpPr txBox="1"/>
-          <p:nvPr/>
-        </p:nvSpPr>
-        <p:spPr>
-          <a:xfrm>
-            <a:off x="481779" y="1418519"/>
-            <a:ext cx="1822656" cy="369332"/>
-          </a:xfrm>
-          <a:prstGeom prst="rect">
-            <a:avLst/>
-          </a:prstGeom>
-          <a:noFill/>
-          <a:ln>
-            <a:solidFill>
-              <a:schemeClr val="tx1"/>
-            </a:solidFill>
-          </a:ln>
-        </p:spPr>
-        <p:txBody>
-          <a:bodyPr wrap="square" rtlCol="0">
-            <a:spAutoFit/>
-          </a:bodyPr>
-          <a:lstStyle/>
-          <a:p>
-            <a:r>
               <a:rPr lang="en-IN" dirty="0"/>
               <a:t>SW Requirement</a:t>
             </a:r>
           </a:p>
         </p:txBody>
       </p:sp>
-      <p:sp>
-        <p:nvSpPr>
-          <p:cNvPr id="22" name="TextBox 21">
-            <a:extLst>
-              <a:ext uri="{FF2B5EF4-FFF2-40B4-BE49-F238E27FC236}">
-                <a16:creationId xmlns:a16="http://schemas.microsoft.com/office/drawing/2014/main" id="{1EA7152C-5985-CEDC-AA3B-D4DC064104C8}"/>
-              </a:ext>
-            </a:extLst>
-          </p:cNvPr>
-          <p:cNvSpPr txBox="1"/>
-          <p:nvPr/>
-        </p:nvSpPr>
-        <p:spPr>
-          <a:xfrm>
-            <a:off x="2359742" y="1355832"/>
-            <a:ext cx="1923433" cy="246221"/>
-          </a:xfrm>
-          <a:prstGeom prst="rect">
-            <a:avLst/>
-          </a:prstGeom>
-          <a:noFill/>
-        </p:spPr>
-        <p:txBody>
-          <a:bodyPr wrap="square" rtlCol="0">
-            <a:spAutoFit/>
-          </a:bodyPr>
-          <a:lstStyle/>
-          <a:p>
-            <a:r>
-              <a:rPr lang="en-IN" sz="1000" dirty="0"/>
-              <a:t>Test Spec Generation [Input - 1]</a:t>
-            </a:r>
-          </a:p>
-        </p:txBody>
-      </p:sp>
-      <p:sp>
-        <p:nvSpPr>
-          <p:cNvPr id="23" name="TextBox 22">
-            <a:extLst>
-              <a:ext uri="{FF2B5EF4-FFF2-40B4-BE49-F238E27FC236}">
-                <a16:creationId xmlns:a16="http://schemas.microsoft.com/office/drawing/2014/main" id="{E49186AA-EDD7-BA88-5FF6-917C87C8D606}"/>
-              </a:ext>
-            </a:extLst>
-          </p:cNvPr>
-          <p:cNvSpPr txBox="1"/>
-          <p:nvPr/>
-        </p:nvSpPr>
-        <p:spPr>
-          <a:xfrm>
-            <a:off x="2314575" y="2166125"/>
-            <a:ext cx="1923433" cy="246221"/>
-          </a:xfrm>
-          <a:prstGeom prst="rect">
-            <a:avLst/>
-          </a:prstGeom>
-          <a:noFill/>
-        </p:spPr>
-        <p:txBody>
-          <a:bodyPr wrap="square" rtlCol="0">
-            <a:spAutoFit/>
-          </a:bodyPr>
-          <a:lstStyle/>
-          <a:p>
-            <a:r>
-              <a:rPr lang="en-IN" sz="1000" dirty="0"/>
-              <a:t>Test Spec Generation [Input - 2]</a:t>
-            </a:r>
-          </a:p>
-        </p:txBody>
-      </p:sp>
       <p:cxnSp>
         <p:nvCxnSpPr>
-          <p:cNvPr id="25" name="Straight Arrow Connector 24">
-            <a:extLst>
-              <a:ext uri="{FF2B5EF4-FFF2-40B4-BE49-F238E27FC236}">
-                <a16:creationId xmlns:a16="http://schemas.microsoft.com/office/drawing/2014/main" id="{F16528DD-0045-FE3B-A9CB-83F3353F01A1}"/>
-              </a:ext>
-            </a:extLst>
-          </p:cNvPr>
-          <p:cNvCxnSpPr/>
+          <p:cNvPr id="14" name="Straight Arrow Connector 13">
+            <a:extLst>
+              <a:ext uri="{FF2B5EF4-FFF2-40B4-BE49-F238E27FC236}">
+                <a16:creationId xmlns:a16="http://schemas.microsoft.com/office/drawing/2014/main" id="{519FCA99-87FB-1370-3072-8302D063126A}"/>
+              </a:ext>
+            </a:extLst>
+          </p:cNvPr>
+          <p:cNvCxnSpPr>
+            <a:cxnSpLocks/>
+            <a:stCxn id="10" idx="3"/>
+          </p:cNvCxnSpPr>
           <p:nvPr/>
         </p:nvCxnSpPr>
         <p:spPr>
           <a:xfrm>
-            <a:off x="2314575" y="1671484"/>
-            <a:ext cx="2173850" cy="0"/>
+            <a:off x="2528121" y="1231229"/>
+            <a:ext cx="1960304" cy="450087"/>
           </a:xfrm>
           <a:prstGeom prst="straightConnector1">
             <a:avLst/>
@@ -5637,47 +5727,41 @@
           </a:fontRef>
         </p:style>
       </p:cxnSp>
-      <p:cxnSp>
-        <p:nvCxnSpPr>
-          <p:cNvPr id="28" name="Straight Arrow Connector 27">
-            <a:extLst>
-              <a:ext uri="{FF2B5EF4-FFF2-40B4-BE49-F238E27FC236}">
-                <a16:creationId xmlns:a16="http://schemas.microsoft.com/office/drawing/2014/main" id="{64040213-D05E-FEDA-8C3E-46025B05E2CF}"/>
-              </a:ext>
-            </a:extLst>
-          </p:cNvPr>
-          <p:cNvCxnSpPr>
-            <a:stCxn id="10" idx="3"/>
-          </p:cNvCxnSpPr>
-          <p:nvPr/>
-        </p:nvCxnSpPr>
-        <p:spPr>
-          <a:xfrm flipV="1">
-            <a:off x="2303208" y="2412346"/>
-            <a:ext cx="2223315" cy="21017"/>
-          </a:xfrm>
-          <a:prstGeom prst="straightConnector1">
-            <a:avLst/>
-          </a:prstGeom>
-          <a:ln>
-            <a:tailEnd type="triangle"/>
-          </a:ln>
-        </p:spPr>
-        <p:style>
-          <a:lnRef idx="1">
-            <a:schemeClr val="dk1"/>
-          </a:lnRef>
-          <a:fillRef idx="0">
-            <a:schemeClr val="dk1"/>
-          </a:fillRef>
-          <a:effectRef idx="0">
-            <a:schemeClr val="dk1"/>
-          </a:effectRef>
-          <a:fontRef idx="minor">
-            <a:schemeClr val="tx1"/>
-          </a:fontRef>
-        </p:style>
-      </p:cxnSp>
+      <p:sp>
+        <p:nvSpPr>
+          <p:cNvPr id="22" name="TextBox 21">
+            <a:extLst>
+              <a:ext uri="{FF2B5EF4-FFF2-40B4-BE49-F238E27FC236}">
+                <a16:creationId xmlns:a16="http://schemas.microsoft.com/office/drawing/2014/main" id="{8E00CAB6-3844-0835-1819-457AFEF5214F}"/>
+              </a:ext>
+            </a:extLst>
+          </p:cNvPr>
+          <p:cNvSpPr txBox="1"/>
+          <p:nvPr/>
+        </p:nvSpPr>
+        <p:spPr>
+          <a:xfrm>
+            <a:off x="3050305" y="1151051"/>
+            <a:ext cx="1923433" cy="246221"/>
+          </a:xfrm>
+          <a:prstGeom prst="rect">
+            <a:avLst/>
+          </a:prstGeom>
+          <a:noFill/>
+        </p:spPr>
+        <p:txBody>
+          <a:bodyPr wrap="square" rtlCol="0">
+            <a:spAutoFit/>
+          </a:bodyPr>
+          <a:lstStyle/>
+          <a:p>
+            <a:r>
+              <a:rPr lang="en-IN" sz="1000" dirty="0"/>
+              <a:t>Test Spec Generation</a:t>
+            </a:r>
+          </a:p>
+        </p:txBody>
+      </p:sp>
     </p:spTree>
     <p:extLst>
       <p:ext uri="{BB962C8B-B14F-4D97-AF65-F5344CB8AC3E}">
@@ -5761,7 +5845,7 @@
         </p:nvSpPr>
         <p:spPr>
           <a:xfrm>
-            <a:off x="786585" y="3180816"/>
+            <a:off x="325083" y="3234401"/>
             <a:ext cx="1703438" cy="923330"/>
           </a:xfrm>
           <a:prstGeom prst="rect">
@@ -5903,7 +5987,7 @@
           <a:lstStyle/>
           <a:p>
             <a:r>
-              <a:rPr lang="en-IN" dirty="0"/>
+              <a:rPr lang="en-IN" dirty="0" err="1"/>
               <a:t>ChromaDB</a:t>
             </a:r>
             <a:br>
@@ -5930,8 +6014,8 @@
         </p:nvSpPr>
         <p:spPr>
           <a:xfrm>
-            <a:off x="854804" y="1974240"/>
-            <a:ext cx="1703439" cy="954107"/>
+            <a:off x="824681" y="1680129"/>
+            <a:ext cx="1703439" cy="1323439"/>
           </a:xfrm>
           <a:prstGeom prst="rect">
             <a:avLst/>
@@ -5950,7 +6034,7 @@
           <a:lstStyle/>
           <a:p>
             <a:r>
-              <a:rPr lang="en-IN" sz="1400" dirty="0"/>
+              <a:rPr lang="en-IN" sz="1600" dirty="0"/>
               <a:t>System Prompts (Bootloader, UDS, Vehicle Communication,…)</a:t>
             </a:r>
           </a:p>
@@ -5972,9 +6056,9 @@
           <p:nvPr/>
         </p:nvCxnSpPr>
         <p:spPr>
-          <a:xfrm>
-            <a:off x="2558243" y="2451294"/>
-            <a:ext cx="1930182" cy="15006"/>
+          <a:xfrm flipV="1">
+            <a:off x="2528120" y="2337091"/>
+            <a:ext cx="1998402" cy="4758"/>
           </a:xfrm>
           <a:prstGeom prst="straightConnector1">
             <a:avLst/>
@@ -6055,13 +6139,14 @@
           </p:cNvPr>
           <p:cNvCxnSpPr>
             <a:cxnSpLocks/>
+            <a:stCxn id="3" idx="3"/>
           </p:cNvCxnSpPr>
           <p:nvPr/>
         </p:nvCxnSpPr>
         <p:spPr>
           <a:xfrm>
-            <a:off x="2490023" y="3421626"/>
-            <a:ext cx="1998402" cy="0"/>
+            <a:off x="2028521" y="3696066"/>
+            <a:ext cx="606524" cy="576292"/>
           </a:xfrm>
           <a:prstGeom prst="straightConnector1">
             <a:avLst/>
@@ -6394,6 +6479,41 @@
       </p:cxnSp>
       <p:sp>
         <p:nvSpPr>
+          <p:cNvPr id="44" name="TextBox 43">
+            <a:extLst>
+              <a:ext uri="{FF2B5EF4-FFF2-40B4-BE49-F238E27FC236}">
+                <a16:creationId xmlns:a16="http://schemas.microsoft.com/office/drawing/2014/main" id="{597D0596-3B09-8F8E-56C3-5276F6A3D1AC}"/>
+              </a:ext>
+            </a:extLst>
+          </p:cNvPr>
+          <p:cNvSpPr txBox="1"/>
+          <p:nvPr/>
+        </p:nvSpPr>
+        <p:spPr>
+          <a:xfrm>
+            <a:off x="2746273" y="1976415"/>
+            <a:ext cx="1308923" cy="246221"/>
+          </a:xfrm>
+          <a:prstGeom prst="rect">
+            <a:avLst/>
+          </a:prstGeom>
+          <a:noFill/>
+        </p:spPr>
+        <p:txBody>
+          <a:bodyPr wrap="square" rtlCol="0">
+            <a:spAutoFit/>
+          </a:bodyPr>
+          <a:lstStyle/>
+          <a:p>
+            <a:r>
+              <a:rPr lang="en-IN" sz="1000" dirty="0"/>
+              <a:t>Test Spec Generation</a:t>
+            </a:r>
+          </a:p>
+        </p:txBody>
+      </p:sp>
+      <p:sp>
+        <p:nvSpPr>
           <p:cNvPr id="45" name="TextBox 44">
             <a:extLst>
               <a:ext uri="{FF2B5EF4-FFF2-40B4-BE49-F238E27FC236}">
@@ -6406,7 +6526,7 @@
         </p:nvSpPr>
         <p:spPr>
           <a:xfrm>
-            <a:off x="2516754" y="3180780"/>
+            <a:off x="2135601" y="3553995"/>
             <a:ext cx="1579922" cy="246221"/>
           </a:xfrm>
           <a:prstGeom prst="rect">
@@ -6660,7 +6780,7 @@
           <p:cNvPr id="12" name="TextBox 11">
             <a:extLst>
               <a:ext uri="{FF2B5EF4-FFF2-40B4-BE49-F238E27FC236}">
-                <a16:creationId xmlns:a16="http://schemas.microsoft.com/office/drawing/2014/main" id="{A3E5CFC6-58E2-4470-16D2-4155944F7C83}"/>
+                <a16:creationId xmlns:a16="http://schemas.microsoft.com/office/drawing/2014/main" id="{1CB90735-9EBA-4A27-16F9-6A2013F95CFD}"/>
               </a:ext>
             </a:extLst>
           </p:cNvPr>
@@ -6669,8 +6789,8 @@
         </p:nvSpPr>
         <p:spPr>
           <a:xfrm>
-            <a:off x="843117" y="1408740"/>
-            <a:ext cx="1703439" cy="338554"/>
+            <a:off x="705465" y="1309159"/>
+            <a:ext cx="1822656" cy="335756"/>
           </a:xfrm>
           <a:prstGeom prst="rect">
             <a:avLst/>
@@ -6689,7 +6809,7 @@
           <a:lstStyle/>
           <a:p>
             <a:r>
-              <a:rPr lang="en-IN" sz="1600" dirty="0"/>
+              <a:rPr lang="en-IN" dirty="0"/>
               <a:t>SW Requirement</a:t>
             </a:r>
           </a:p>
@@ -6700,7 +6820,7 @@
           <p:cNvPr id="13" name="Straight Arrow Connector 12">
             <a:extLst>
               <a:ext uri="{FF2B5EF4-FFF2-40B4-BE49-F238E27FC236}">
-                <a16:creationId xmlns:a16="http://schemas.microsoft.com/office/drawing/2014/main" id="{432DBE4F-866F-B95E-EDFD-F2A31BE6D49D}"/>
+                <a16:creationId xmlns:a16="http://schemas.microsoft.com/office/drawing/2014/main" id="{00977384-4DA9-4C66-300E-8442593A54D3}"/>
               </a:ext>
             </a:extLst>
           </p:cNvPr>
@@ -6712,8 +6832,8 @@
         </p:nvCxnSpPr>
         <p:spPr>
           <a:xfrm>
-            <a:off x="2546556" y="1578017"/>
-            <a:ext cx="1936337" cy="137"/>
+            <a:off x="2528121" y="1477037"/>
+            <a:ext cx="1978740" cy="0"/>
           </a:xfrm>
           <a:prstGeom prst="straightConnector1">
             <a:avLst/>
@@ -6742,7 +6862,7 @@
           <p:cNvPr id="15" name="TextBox 14">
             <a:extLst>
               <a:ext uri="{FF2B5EF4-FFF2-40B4-BE49-F238E27FC236}">
-                <a16:creationId xmlns:a16="http://schemas.microsoft.com/office/drawing/2014/main" id="{EDCFD50E-169A-1817-C456-738C6122C6FB}"/>
+                <a16:creationId xmlns:a16="http://schemas.microsoft.com/office/drawing/2014/main" id="{624327D6-8BD1-13B0-71C8-621DDC4D23D6}"/>
               </a:ext>
             </a:extLst>
           </p:cNvPr>
@@ -6751,8 +6871,8 @@
         </p:nvSpPr>
         <p:spPr>
           <a:xfrm>
-            <a:off x="2553305" y="1307453"/>
-            <a:ext cx="1923433" cy="246221"/>
+            <a:off x="2686356" y="1192808"/>
+            <a:ext cx="1923433" cy="223837"/>
           </a:xfrm>
           <a:prstGeom prst="rect">
             <a:avLst/>
@@ -6767,42 +6887,7 @@
           <a:p>
             <a:r>
               <a:rPr lang="en-IN" sz="1000" dirty="0"/>
-              <a:t>Test Spec Generation [Input - 1]</a:t>
-            </a:r>
-          </a:p>
-        </p:txBody>
-      </p:sp>
-      <p:sp>
-        <p:nvSpPr>
-          <p:cNvPr id="21" name="TextBox 20">
-            <a:extLst>
-              <a:ext uri="{FF2B5EF4-FFF2-40B4-BE49-F238E27FC236}">
-                <a16:creationId xmlns:a16="http://schemas.microsoft.com/office/drawing/2014/main" id="{DE50316F-BBAA-7494-20A7-6607E6BDBA0E}"/>
-              </a:ext>
-            </a:extLst>
-          </p:cNvPr>
-          <p:cNvSpPr txBox="1"/>
-          <p:nvPr/>
-        </p:nvSpPr>
-        <p:spPr>
-          <a:xfrm>
-            <a:off x="2558243" y="2168170"/>
-            <a:ext cx="1923433" cy="246221"/>
-          </a:xfrm>
-          <a:prstGeom prst="rect">
-            <a:avLst/>
-          </a:prstGeom>
-          <a:noFill/>
-        </p:spPr>
-        <p:txBody>
-          <a:bodyPr wrap="square" rtlCol="0">
-            <a:spAutoFit/>
-          </a:bodyPr>
-          <a:lstStyle/>
-          <a:p>
-            <a:r>
-              <a:rPr lang="en-IN" sz="1000" dirty="0"/>
-              <a:t>Test Spec Generation [Input - 2]</a:t>
+              <a:t>Test Spec Generation</a:t>
             </a:r>
           </a:p>
         </p:txBody>
@@ -6828,7 +6913,7 @@
         <p:cNvPr id="1" name="">
           <a:extLst>
             <a:ext uri="{FF2B5EF4-FFF2-40B4-BE49-F238E27FC236}">
-              <a16:creationId xmlns:a16="http://schemas.microsoft.com/office/drawing/2014/main" id="{0B0479DD-FF9E-5A2A-699A-AD6974D84A48}"/>
+              <a16:creationId xmlns:a16="http://schemas.microsoft.com/office/drawing/2014/main" id="{F0A59E10-76B0-0C35-9AEC-09F5141200EA}"/>
             </a:ext>
           </a:extLst>
         </p:cNvPr>
@@ -6848,7 +6933,7 @@
           <p:cNvPr id="2" name="Title 1">
             <a:extLst>
               <a:ext uri="{FF2B5EF4-FFF2-40B4-BE49-F238E27FC236}">
-                <a16:creationId xmlns:a16="http://schemas.microsoft.com/office/drawing/2014/main" id="{11A0F219-10CC-8414-AE3D-F06D29632729}"/>
+                <a16:creationId xmlns:a16="http://schemas.microsoft.com/office/drawing/2014/main" id="{2FE66BDC-0E2B-922B-9650-25B2E4224D4C}"/>
               </a:ext>
             </a:extLst>
           </p:cNvPr>
@@ -6861,7 +6946,7 @@
         </p:nvSpPr>
         <p:spPr>
           <a:xfrm>
-            <a:off x="78660" y="25986"/>
+            <a:off x="521113" y="25986"/>
             <a:ext cx="10301748" cy="1267901"/>
           </a:xfrm>
         </p:spPr>
@@ -6883,7 +6968,7 @@
           <p:cNvPr id="3" name="TextBox 2">
             <a:extLst>
               <a:ext uri="{FF2B5EF4-FFF2-40B4-BE49-F238E27FC236}">
-                <a16:creationId xmlns:a16="http://schemas.microsoft.com/office/drawing/2014/main" id="{001CB2BF-369A-3377-4607-2BFAE2C2600D}"/>
+                <a16:creationId xmlns:a16="http://schemas.microsoft.com/office/drawing/2014/main" id="{C6D0FC41-DB37-9883-EBBC-7FC7591D32B7}"/>
               </a:ext>
             </a:extLst>
           </p:cNvPr>
@@ -6892,7 +6977,7 @@
         </p:nvSpPr>
         <p:spPr>
           <a:xfrm>
-            <a:off x="786585" y="3298803"/>
+            <a:off x="521113" y="3174374"/>
             <a:ext cx="1703438" cy="923330"/>
           </a:xfrm>
           <a:prstGeom prst="rect">
@@ -6923,7 +7008,7 @@
           <p:cNvPr id="4" name="TextBox 3">
             <a:extLst>
               <a:ext uri="{FF2B5EF4-FFF2-40B4-BE49-F238E27FC236}">
-                <a16:creationId xmlns:a16="http://schemas.microsoft.com/office/drawing/2014/main" id="{F22232E8-5502-58AB-7BA2-9349C9A21B02}"/>
+                <a16:creationId xmlns:a16="http://schemas.microsoft.com/office/drawing/2014/main" id="{657376E9-7C73-E1E6-8940-C9FE47DB6106}"/>
               </a:ext>
             </a:extLst>
           </p:cNvPr>
@@ -6932,7 +7017,7 @@
         </p:nvSpPr>
         <p:spPr>
           <a:xfrm>
-            <a:off x="4488425" y="1376251"/>
+            <a:off x="4930878" y="1376251"/>
             <a:ext cx="2743201" cy="4524315"/>
           </a:xfrm>
           <a:prstGeom prst="rect">
@@ -7008,7 +7093,7 @@
           <p:cNvPr id="5" name="TextBox 4">
             <a:extLst>
               <a:ext uri="{FF2B5EF4-FFF2-40B4-BE49-F238E27FC236}">
-                <a16:creationId xmlns:a16="http://schemas.microsoft.com/office/drawing/2014/main" id="{6ECAFC67-3C0B-A8D6-62FA-A6293DBB8B62}"/>
+                <a16:creationId xmlns:a16="http://schemas.microsoft.com/office/drawing/2014/main" id="{52DD90F1-4E0C-42B9-56FC-ADFFE8520FE8}"/>
               </a:ext>
             </a:extLst>
           </p:cNvPr>
@@ -7017,7 +7102,7 @@
         </p:nvSpPr>
         <p:spPr>
           <a:xfrm>
-            <a:off x="1359925" y="4390345"/>
+            <a:off x="1802378" y="4390345"/>
             <a:ext cx="1386348" cy="923330"/>
           </a:xfrm>
           <a:prstGeom prst="rect">
@@ -7037,7 +7122,7 @@
           <a:lstStyle/>
           <a:p>
             <a:r>
-              <a:rPr lang="en-IN" dirty="0"/>
+              <a:rPr lang="en-IN" dirty="0" err="1"/>
               <a:t>ChromaDB</a:t>
             </a:r>
             <a:br>
@@ -7052,10 +7137,10 @@
       </p:sp>
       <p:sp>
         <p:nvSpPr>
-          <p:cNvPr id="9" name="TextBox 8">
-            <a:extLst>
-              <a:ext uri="{FF2B5EF4-FFF2-40B4-BE49-F238E27FC236}">
-                <a16:creationId xmlns:a16="http://schemas.microsoft.com/office/drawing/2014/main" id="{F2269E97-6F60-440F-FA43-C84D6690DADF}"/>
+          <p:cNvPr id="6" name="TextBox 5">
+            <a:extLst>
+              <a:ext uri="{FF2B5EF4-FFF2-40B4-BE49-F238E27FC236}">
+                <a16:creationId xmlns:a16="http://schemas.microsoft.com/office/drawing/2014/main" id="{87A6BF8A-214F-DDA0-EFB7-823EADBFFF42}"/>
               </a:ext>
             </a:extLst>
           </p:cNvPr>
@@ -7064,8 +7149,8 @@
         </p:nvSpPr>
         <p:spPr>
           <a:xfrm>
-            <a:off x="8230827" y="1376251"/>
-            <a:ext cx="1995948" cy="1200329"/>
+            <a:off x="1139311" y="1894052"/>
+            <a:ext cx="1831263" cy="1077218"/>
           </a:xfrm>
           <a:prstGeom prst="rect">
             <a:avLst/>
@@ -7083,69 +7168,107 @@
           </a:bodyPr>
           <a:lstStyle/>
           <a:p>
-            <a:endParaRPr lang="en-IN" dirty="0"/>
-          </a:p>
-          <a:p>
-            <a:r>
-              <a:rPr lang="en-IN" dirty="0"/>
-              <a:t>Test Specification (*.JSON)</a:t>
-            </a:r>
-          </a:p>
-          <a:p>
-            <a:endParaRPr lang="en-IN" dirty="0"/>
+            <a:r>
+              <a:rPr lang="en-IN" sz="1600" dirty="0"/>
+              <a:t>System Prompts (Bootloader, UDS, Vehicle Communication,…)</a:t>
+            </a:r>
           </a:p>
         </p:txBody>
       </p:sp>
       <p:cxnSp>
         <p:nvCxnSpPr>
-          <p:cNvPr id="11" name="Straight Arrow Connector 10">
-            <a:extLst>
-              <a:ext uri="{FF2B5EF4-FFF2-40B4-BE49-F238E27FC236}">
-                <a16:creationId xmlns:a16="http://schemas.microsoft.com/office/drawing/2014/main" id="{BF0F3CE5-CA6D-2743-A127-BA0C465D01BB}"/>
+          <p:cNvPr id="8" name="Straight Arrow Connector 7">
+            <a:extLst>
+              <a:ext uri="{FF2B5EF4-FFF2-40B4-BE49-F238E27FC236}">
+                <a16:creationId xmlns:a16="http://schemas.microsoft.com/office/drawing/2014/main" id="{B5815D4C-13CE-109F-CD82-02043B82F6AA}"/>
               </a:ext>
             </a:extLst>
           </p:cNvPr>
           <p:cNvCxnSpPr>
             <a:cxnSpLocks/>
+            <a:stCxn id="6" idx="3"/>
           </p:cNvCxnSpPr>
           <p:nvPr/>
         </p:nvCxnSpPr>
         <p:spPr>
           <a:xfrm>
-            <a:off x="2490023" y="3539613"/>
-            <a:ext cx="1998402" cy="0"/>
+            <a:off x="2970574" y="2432661"/>
+            <a:ext cx="1998402" cy="25447"/>
           </a:xfrm>
           <a:prstGeom prst="straightConnector1">
             <a:avLst/>
           </a:prstGeom>
           <a:ln>
-            <a:solidFill>
-              <a:schemeClr val="tx1"/>
-            </a:solidFill>
             <a:tailEnd type="triangle"/>
           </a:ln>
         </p:spPr>
         <p:style>
           <a:lnRef idx="1">
-            <a:schemeClr val="accent1"/>
+            <a:schemeClr val="dk1"/>
           </a:lnRef>
           <a:fillRef idx="0">
-            <a:schemeClr val="accent1"/>
+            <a:schemeClr val="dk1"/>
           </a:fillRef>
           <a:effectRef idx="0">
-            <a:schemeClr val="accent1"/>
+            <a:schemeClr val="dk1"/>
           </a:effectRef>
           <a:fontRef idx="minor">
             <a:schemeClr val="tx1"/>
           </a:fontRef>
         </p:style>
       </p:cxnSp>
+      <p:sp>
+        <p:nvSpPr>
+          <p:cNvPr id="9" name="TextBox 8">
+            <a:extLst>
+              <a:ext uri="{FF2B5EF4-FFF2-40B4-BE49-F238E27FC236}">
+                <a16:creationId xmlns:a16="http://schemas.microsoft.com/office/drawing/2014/main" id="{5F237DBE-C1F1-1C7A-DE76-AB1BF78F0590}"/>
+              </a:ext>
+            </a:extLst>
+          </p:cNvPr>
+          <p:cNvSpPr txBox="1"/>
+          <p:nvPr/>
+        </p:nvSpPr>
+        <p:spPr>
+          <a:xfrm>
+            <a:off x="8673280" y="1376251"/>
+            <a:ext cx="1995948" cy="1200329"/>
+          </a:xfrm>
+          <a:prstGeom prst="rect">
+            <a:avLst/>
+          </a:prstGeom>
+          <a:noFill/>
+          <a:ln>
+            <a:solidFill>
+              <a:schemeClr val="tx1"/>
+            </a:solidFill>
+          </a:ln>
+        </p:spPr>
+        <p:txBody>
+          <a:bodyPr wrap="square" rtlCol="0">
+            <a:spAutoFit/>
+          </a:bodyPr>
+          <a:lstStyle/>
+          <a:p>
+            <a:endParaRPr lang="en-IN" dirty="0"/>
+          </a:p>
+          <a:p>
+            <a:r>
+              <a:rPr lang="en-IN" dirty="0"/>
+              <a:t>Test Specification (*.JSON)</a:t>
+            </a:r>
+          </a:p>
+          <a:p>
+            <a:endParaRPr lang="en-IN" dirty="0"/>
+          </a:p>
+        </p:txBody>
+      </p:sp>
       <p:cxnSp>
         <p:nvCxnSpPr>
           <p:cNvPr id="17" name="Straight Arrow Connector 16">
             <a:extLst>
               <a:ext uri="{FF2B5EF4-FFF2-40B4-BE49-F238E27FC236}">
-                <a16:creationId xmlns:a16="http://schemas.microsoft.com/office/drawing/2014/main" id="{DD7973FB-C703-9C9F-D390-425207A1423D}"/>
+                <a16:creationId xmlns:a16="http://schemas.microsoft.com/office/drawing/2014/main" id="{E5D4F3FA-569C-F9EF-2249-BA7021FE6443}"/>
               </a:ext>
             </a:extLst>
           </p:cNvPr>
@@ -7156,7 +7279,7 @@
         </p:nvCxnSpPr>
         <p:spPr>
           <a:xfrm>
-            <a:off x="7231626" y="1976415"/>
+            <a:off x="7674079" y="1976415"/>
             <a:ext cx="999201" cy="1"/>
           </a:xfrm>
           <a:prstGeom prst="straightConnector1">
@@ -7186,7 +7309,7 @@
           <p:cNvPr id="18" name="TextBox 17">
             <a:extLst>
               <a:ext uri="{FF2B5EF4-FFF2-40B4-BE49-F238E27FC236}">
-                <a16:creationId xmlns:a16="http://schemas.microsoft.com/office/drawing/2014/main" id="{BDF3CA66-10B3-3379-8731-63BE43838BD3}"/>
+                <a16:creationId xmlns:a16="http://schemas.microsoft.com/office/drawing/2014/main" id="{E8EAE9EA-E69B-1A37-04F6-1F583C7AE9FF}"/>
               </a:ext>
             </a:extLst>
           </p:cNvPr>
@@ -7195,7 +7318,7 @@
         </p:nvSpPr>
         <p:spPr>
           <a:xfrm>
-            <a:off x="8230827" y="3933654"/>
+            <a:off x="8673280" y="3933654"/>
             <a:ext cx="1995948" cy="1200329"/>
           </a:xfrm>
           <a:prstGeom prst="rect">
@@ -7232,7 +7355,7 @@
           <p:cNvPr id="20" name="Straight Arrow Connector 19">
             <a:extLst>
               <a:ext uri="{FF2B5EF4-FFF2-40B4-BE49-F238E27FC236}">
-                <a16:creationId xmlns:a16="http://schemas.microsoft.com/office/drawing/2014/main" id="{B12EEE5C-1F11-17E0-59D9-087E695A193F}"/>
+                <a16:creationId xmlns:a16="http://schemas.microsoft.com/office/drawing/2014/main" id="{600693AD-5564-7B38-4D7B-039B0B20D67A}"/>
               </a:ext>
             </a:extLst>
           </p:cNvPr>
@@ -7244,7 +7367,7 @@
         </p:nvCxnSpPr>
         <p:spPr>
           <a:xfrm>
-            <a:off x="7231626" y="4533819"/>
+            <a:off x="7674079" y="4533819"/>
             <a:ext cx="999201" cy="0"/>
           </a:xfrm>
           <a:prstGeom prst="straightConnector1">
@@ -7274,7 +7397,7 @@
           <p:cNvPr id="27" name="Connector: Elbow 26">
             <a:extLst>
               <a:ext uri="{FF2B5EF4-FFF2-40B4-BE49-F238E27FC236}">
-                <a16:creationId xmlns:a16="http://schemas.microsoft.com/office/drawing/2014/main" id="{4501974B-225A-B632-BFA2-106D783E6E32}"/>
+                <a16:creationId xmlns:a16="http://schemas.microsoft.com/office/drawing/2014/main" id="{242492F2-C8D2-ED29-7C31-C8BE45ED00AB}"/>
               </a:ext>
             </a:extLst>
           </p:cNvPr>
@@ -7286,7 +7409,7 @@
         </p:nvCxnSpPr>
         <p:spPr>
           <a:xfrm flipH="1">
-            <a:off x="2528121" y="1976416"/>
+            <a:off x="2970574" y="1976416"/>
             <a:ext cx="7698654" cy="4291649"/>
           </a:xfrm>
           <a:prstGeom prst="bentConnector3">
@@ -7324,7 +7447,7 @@
           <p:cNvPr id="30" name="Connector: Elbow 29">
             <a:extLst>
               <a:ext uri="{FF2B5EF4-FFF2-40B4-BE49-F238E27FC236}">
-                <a16:creationId xmlns:a16="http://schemas.microsoft.com/office/drawing/2014/main" id="{06DEED56-C833-B732-82BB-1674920D300B}"/>
+                <a16:creationId xmlns:a16="http://schemas.microsoft.com/office/drawing/2014/main" id="{9012079B-5407-7052-F8A5-D6233C105E13}"/>
               </a:ext>
             </a:extLst>
           </p:cNvPr>
@@ -7335,7 +7458,7 @@
         </p:nvCxnSpPr>
         <p:spPr>
           <a:xfrm flipV="1">
-            <a:off x="2528121" y="5517274"/>
+            <a:off x="2970574" y="5517274"/>
             <a:ext cx="1960306" cy="741480"/>
           </a:xfrm>
           <a:prstGeom prst="bentConnector3">
@@ -7367,7 +7490,7 @@
           <p:cNvPr id="40" name="Straight Arrow Connector 39">
             <a:extLst>
               <a:ext uri="{FF2B5EF4-FFF2-40B4-BE49-F238E27FC236}">
-                <a16:creationId xmlns:a16="http://schemas.microsoft.com/office/drawing/2014/main" id="{D4B4E042-3259-C2CB-8740-0DA25C051D47}"/>
+                <a16:creationId xmlns:a16="http://schemas.microsoft.com/office/drawing/2014/main" id="{F4AE24DC-D038-0B57-5B9D-36C7FDBCB31A}"/>
               </a:ext>
             </a:extLst>
           </p:cNvPr>
@@ -7378,7 +7501,7 @@
         </p:nvCxnSpPr>
         <p:spPr>
           <a:xfrm flipH="1">
-            <a:off x="2746273" y="4533818"/>
+            <a:off x="3188726" y="4533818"/>
             <a:ext cx="1742152" cy="0"/>
           </a:xfrm>
           <a:prstGeom prst="straightConnector1">
@@ -7408,7 +7531,7 @@
           <p:cNvPr id="42" name="Straight Arrow Connector 41">
             <a:extLst>
               <a:ext uri="{FF2B5EF4-FFF2-40B4-BE49-F238E27FC236}">
-                <a16:creationId xmlns:a16="http://schemas.microsoft.com/office/drawing/2014/main" id="{57BF9E31-5966-1B42-9FA2-BD1BA448D747}"/>
+                <a16:creationId xmlns:a16="http://schemas.microsoft.com/office/drawing/2014/main" id="{41899A2B-FE75-CCD9-9532-0CB79A0C2A0E}"/>
               </a:ext>
             </a:extLst>
           </p:cNvPr>
@@ -7419,7 +7542,7 @@
         </p:nvCxnSpPr>
         <p:spPr>
           <a:xfrm>
-            <a:off x="2746273" y="5133983"/>
+            <a:off x="3188726" y="5133983"/>
             <a:ext cx="1742152" cy="0"/>
           </a:xfrm>
           <a:prstGeom prst="straightConnector1">
@@ -7446,10 +7569,10 @@
       </p:cxnSp>
       <p:sp>
         <p:nvSpPr>
-          <p:cNvPr id="45" name="TextBox 44">
-            <a:extLst>
-              <a:ext uri="{FF2B5EF4-FFF2-40B4-BE49-F238E27FC236}">
-                <a16:creationId xmlns:a16="http://schemas.microsoft.com/office/drawing/2014/main" id="{4D6618E4-9AE1-A560-B09E-85287F33467E}"/>
+          <p:cNvPr id="44" name="TextBox 43">
+            <a:extLst>
+              <a:ext uri="{FF2B5EF4-FFF2-40B4-BE49-F238E27FC236}">
+                <a16:creationId xmlns:a16="http://schemas.microsoft.com/office/drawing/2014/main" id="{09DC5380-86B4-FED7-5A0B-A5AAD04BC769}"/>
               </a:ext>
             </a:extLst>
           </p:cNvPr>
@@ -7458,8 +7581,8 @@
         </p:nvSpPr>
         <p:spPr>
           <a:xfrm>
-            <a:off x="2516754" y="3298767"/>
-            <a:ext cx="1579922" cy="246221"/>
+            <a:off x="3188726" y="1976415"/>
+            <a:ext cx="1308923" cy="246221"/>
           </a:xfrm>
           <a:prstGeom prst="rect">
             <a:avLst/>
@@ -7474,17 +7597,17 @@
           <a:p>
             <a:r>
               <a:rPr lang="en-IN" sz="1000" dirty="0"/>
-              <a:t>CAPL Generation [Input-1]</a:t>
-            </a:r>
-          </a:p>
-        </p:txBody>
-      </p:sp>
-      <p:sp>
-        <p:nvSpPr>
-          <p:cNvPr id="52" name="TextBox 51">
-            <a:extLst>
-              <a:ext uri="{FF2B5EF4-FFF2-40B4-BE49-F238E27FC236}">
-                <a16:creationId xmlns:a16="http://schemas.microsoft.com/office/drawing/2014/main" id="{0231A853-74A4-D594-BFA6-1EEDD8931FB3}"/>
+              <a:t>Test Spec Generation</a:t>
+            </a:r>
+          </a:p>
+        </p:txBody>
+      </p:sp>
+      <p:sp>
+        <p:nvSpPr>
+          <p:cNvPr id="45" name="TextBox 44">
+            <a:extLst>
+              <a:ext uri="{FF2B5EF4-FFF2-40B4-BE49-F238E27FC236}">
+                <a16:creationId xmlns:a16="http://schemas.microsoft.com/office/drawing/2014/main" id="{729E06EC-AF91-367A-7ED0-C6386BFA0888}"/>
               </a:ext>
             </a:extLst>
           </p:cNvPr>
@@ -7493,7 +7616,7 @@
         </p:nvSpPr>
         <p:spPr>
           <a:xfrm>
-            <a:off x="2757640" y="4887761"/>
+            <a:off x="391451" y="4180995"/>
             <a:ext cx="1579922" cy="246221"/>
           </a:xfrm>
           <a:prstGeom prst="rect">
@@ -7509,17 +7632,17 @@
           <a:p>
             <a:r>
               <a:rPr lang="en-IN" sz="1000" dirty="0"/>
-              <a:t>CAPL Generation [Input-2]</a:t>
-            </a:r>
-          </a:p>
-        </p:txBody>
-      </p:sp>
-      <p:sp>
-        <p:nvSpPr>
-          <p:cNvPr id="53" name="TextBox 52">
-            <a:extLst>
-              <a:ext uri="{FF2B5EF4-FFF2-40B4-BE49-F238E27FC236}">
-                <a16:creationId xmlns:a16="http://schemas.microsoft.com/office/drawing/2014/main" id="{A30C4A73-0C2E-0BAA-ABDE-4AAA7E4C8251}"/>
+              <a:t>CAPL Generation [Input-1]</a:t>
+            </a:r>
+          </a:p>
+        </p:txBody>
+      </p:sp>
+      <p:sp>
+        <p:nvSpPr>
+          <p:cNvPr id="52" name="TextBox 51">
+            <a:extLst>
+              <a:ext uri="{FF2B5EF4-FFF2-40B4-BE49-F238E27FC236}">
+                <a16:creationId xmlns:a16="http://schemas.microsoft.com/office/drawing/2014/main" id="{A249752D-CED0-3579-3006-EB1E77AB6D50}"/>
               </a:ext>
             </a:extLst>
           </p:cNvPr>
@@ -7528,7 +7651,7 @@
         </p:nvSpPr>
         <p:spPr>
           <a:xfrm>
-            <a:off x="2757640" y="5281802"/>
+            <a:off x="3200093" y="4887761"/>
             <a:ext cx="1579922" cy="246221"/>
           </a:xfrm>
           <a:prstGeom prst="rect">
@@ -7544,17 +7667,17 @@
           <a:p>
             <a:r>
               <a:rPr lang="en-IN" sz="1000" dirty="0"/>
-              <a:t>CAPL Generation [Input-3]</a:t>
-            </a:r>
-          </a:p>
-        </p:txBody>
-      </p:sp>
-      <p:sp>
-        <p:nvSpPr>
-          <p:cNvPr id="54" name="TextBox 53">
-            <a:extLst>
-              <a:ext uri="{FF2B5EF4-FFF2-40B4-BE49-F238E27FC236}">
-                <a16:creationId xmlns:a16="http://schemas.microsoft.com/office/drawing/2014/main" id="{FAA7AAB7-7ADB-40FE-E3A9-7E2BB5EB381B}"/>
+              <a:t>CAPL Generation [Input-2]</a:t>
+            </a:r>
+          </a:p>
+        </p:txBody>
+      </p:sp>
+      <p:sp>
+        <p:nvSpPr>
+          <p:cNvPr id="53" name="TextBox 52">
+            <a:extLst>
+              <a:ext uri="{FF2B5EF4-FFF2-40B4-BE49-F238E27FC236}">
+                <a16:creationId xmlns:a16="http://schemas.microsoft.com/office/drawing/2014/main" id="{2B782AB8-A5AA-1E23-AB89-94C9F02E0667}"/>
               </a:ext>
             </a:extLst>
           </p:cNvPr>
@@ -7563,8 +7686,8 @@
         </p:nvSpPr>
         <p:spPr>
           <a:xfrm>
-            <a:off x="2807720" y="4169860"/>
-            <a:ext cx="1718803" cy="400110"/>
+            <a:off x="3200093" y="5281802"/>
+            <a:ext cx="1579922" cy="246221"/>
           </a:xfrm>
           <a:prstGeom prst="rect">
             <a:avLst/>
@@ -7579,17 +7702,175 @@
           <a:p>
             <a:r>
               <a:rPr lang="en-IN" sz="1000" dirty="0"/>
-              <a:t>DB Generation Automatically – If not generated</a:t>
-            </a:r>
-          </a:p>
-        </p:txBody>
-      </p:sp>
-      <p:sp>
-        <p:nvSpPr>
-          <p:cNvPr id="7" name="Rectangle 6">
-            <a:extLst>
-              <a:ext uri="{FF2B5EF4-FFF2-40B4-BE49-F238E27FC236}">
-                <a16:creationId xmlns:a16="http://schemas.microsoft.com/office/drawing/2014/main" id="{05411798-3B05-51C8-E46A-A6E3B5C5CDD3}"/>
+              <a:t>CAPL Generation [Input-3]</a:t>
+            </a:r>
+          </a:p>
+        </p:txBody>
+      </p:sp>
+      <p:sp>
+        <p:nvSpPr>
+          <p:cNvPr id="54" name="TextBox 53">
+            <a:extLst>
+              <a:ext uri="{FF2B5EF4-FFF2-40B4-BE49-F238E27FC236}">
+                <a16:creationId xmlns:a16="http://schemas.microsoft.com/office/drawing/2014/main" id="{8C1D0BD9-1E81-28A0-6A83-00123EBE88D9}"/>
+              </a:ext>
+            </a:extLst>
+          </p:cNvPr>
+          <p:cNvSpPr txBox="1"/>
+          <p:nvPr/>
+        </p:nvSpPr>
+        <p:spPr>
+          <a:xfrm>
+            <a:off x="3250173" y="4169860"/>
+            <a:ext cx="1718803" cy="400110"/>
+          </a:xfrm>
+          <a:prstGeom prst="rect">
+            <a:avLst/>
+          </a:prstGeom>
+          <a:noFill/>
+        </p:spPr>
+        <p:txBody>
+          <a:bodyPr wrap="square" rtlCol="0">
+            <a:spAutoFit/>
+          </a:bodyPr>
+          <a:lstStyle/>
+          <a:p>
+            <a:r>
+              <a:rPr lang="en-IN" sz="1000" dirty="0"/>
+              <a:t>Automatic DB Generation– If not available</a:t>
+            </a:r>
+          </a:p>
+        </p:txBody>
+      </p:sp>
+      <p:cxnSp>
+        <p:nvCxnSpPr>
+          <p:cNvPr id="10" name="Straight Arrow Connector 9">
+            <a:extLst>
+              <a:ext uri="{FF2B5EF4-FFF2-40B4-BE49-F238E27FC236}">
+                <a16:creationId xmlns:a16="http://schemas.microsoft.com/office/drawing/2014/main" id="{3E3436E1-FFEF-908C-8853-BC9F8FBAF8AC}"/>
+              </a:ext>
+            </a:extLst>
+          </p:cNvPr>
+          <p:cNvCxnSpPr>
+            <a:stCxn id="3" idx="2"/>
+          </p:cNvCxnSpPr>
+          <p:nvPr/>
+        </p:nvCxnSpPr>
+        <p:spPr>
+          <a:xfrm>
+            <a:off x="1372832" y="4097704"/>
+            <a:ext cx="937750" cy="272211"/>
+          </a:xfrm>
+          <a:prstGeom prst="straightConnector1">
+            <a:avLst/>
+          </a:prstGeom>
+          <a:ln>
+            <a:tailEnd type="triangle"/>
+          </a:ln>
+        </p:spPr>
+        <p:style>
+          <a:lnRef idx="1">
+            <a:schemeClr val="dk1"/>
+          </a:lnRef>
+          <a:fillRef idx="0">
+            <a:schemeClr val="dk1"/>
+          </a:fillRef>
+          <a:effectRef idx="0">
+            <a:schemeClr val="dk1"/>
+          </a:effectRef>
+          <a:fontRef idx="minor">
+            <a:schemeClr val="tx1"/>
+          </a:fontRef>
+        </p:style>
+      </p:cxnSp>
+      <p:cxnSp>
+        <p:nvCxnSpPr>
+          <p:cNvPr id="24" name="Connector: Elbow 23">
+            <a:extLst>
+              <a:ext uri="{FF2B5EF4-FFF2-40B4-BE49-F238E27FC236}">
+                <a16:creationId xmlns:a16="http://schemas.microsoft.com/office/drawing/2014/main" id="{7F9A4240-872A-3901-CFE0-E6DBB6D38DEB}"/>
+              </a:ext>
+            </a:extLst>
+          </p:cNvPr>
+          <p:cNvCxnSpPr>
+            <a:stCxn id="18" idx="3"/>
+            <a:endCxn id="5" idx="1"/>
+          </p:cNvCxnSpPr>
+          <p:nvPr/>
+        </p:nvCxnSpPr>
+        <p:spPr>
+          <a:xfrm flipH="1">
+            <a:off x="1802378" y="4533819"/>
+            <a:ext cx="8866850" cy="318191"/>
+          </a:xfrm>
+          <a:prstGeom prst="bentConnector5">
+            <a:avLst>
+              <a:gd name="adj1" fmla="val -11893"/>
+              <a:gd name="adj2" fmla="val 610488"/>
+              <a:gd name="adj3" fmla="val 102578"/>
+            </a:avLst>
+          </a:prstGeom>
+          <a:ln>
+            <a:prstDash val="dash"/>
+            <a:tailEnd type="triangle"/>
+          </a:ln>
+        </p:spPr>
+        <p:style>
+          <a:lnRef idx="1">
+            <a:schemeClr val="dk1"/>
+          </a:lnRef>
+          <a:fillRef idx="0">
+            <a:schemeClr val="dk1"/>
+          </a:fillRef>
+          <a:effectRef idx="0">
+            <a:schemeClr val="dk1"/>
+          </a:effectRef>
+          <a:fontRef idx="minor">
+            <a:schemeClr val="tx1"/>
+          </a:fontRef>
+        </p:style>
+      </p:cxnSp>
+      <p:sp>
+        <p:nvSpPr>
+          <p:cNvPr id="29" name="TextBox 28">
+            <a:extLst>
+              <a:ext uri="{FF2B5EF4-FFF2-40B4-BE49-F238E27FC236}">
+                <a16:creationId xmlns:a16="http://schemas.microsoft.com/office/drawing/2014/main" id="{B372C3E3-D66C-119C-4031-DE4C5F0DF40B}"/>
+              </a:ext>
+            </a:extLst>
+          </p:cNvPr>
+          <p:cNvSpPr txBox="1"/>
+          <p:nvPr/>
+        </p:nvSpPr>
+        <p:spPr>
+          <a:xfrm>
+            <a:off x="638179" y="4887761"/>
+            <a:ext cx="1054508" cy="553998"/>
+          </a:xfrm>
+          <a:prstGeom prst="rect">
+            <a:avLst/>
+          </a:prstGeom>
+          <a:noFill/>
+        </p:spPr>
+        <p:txBody>
+          <a:bodyPr wrap="square" rtlCol="0">
+            <a:spAutoFit/>
+          </a:bodyPr>
+          <a:lstStyle/>
+          <a:p>
+            <a:r>
+              <a:rPr lang="en-IN" sz="1000" dirty="0"/>
+              <a:t>Examples addition from past generation</a:t>
+            </a:r>
+          </a:p>
+        </p:txBody>
+      </p:sp>
+      <p:sp>
+        <p:nvSpPr>
+          <p:cNvPr id="11" name="Rectangle 10">
+            <a:extLst>
+              <a:ext uri="{FF2B5EF4-FFF2-40B4-BE49-F238E27FC236}">
+                <a16:creationId xmlns:a16="http://schemas.microsoft.com/office/drawing/2014/main" id="{3DAD5BB3-6EA0-A06A-DB89-0DF014F3E209}"/>
               </a:ext>
             </a:extLst>
           </p:cNvPr>
@@ -7639,10 +7920,10 @@
       </p:sp>
       <p:sp>
         <p:nvSpPr>
-          <p:cNvPr id="10" name="TextBox 9">
-            <a:extLst>
-              <a:ext uri="{FF2B5EF4-FFF2-40B4-BE49-F238E27FC236}">
-                <a16:creationId xmlns:a16="http://schemas.microsoft.com/office/drawing/2014/main" id="{DAB851BC-41FD-F615-0AC8-C3530E19F02B}"/>
+          <p:cNvPr id="13" name="TextBox 12">
+            <a:extLst>
+              <a:ext uri="{FF2B5EF4-FFF2-40B4-BE49-F238E27FC236}">
+                <a16:creationId xmlns:a16="http://schemas.microsoft.com/office/drawing/2014/main" id="{44878E48-CE8C-DB82-9DB5-CA3EDE4D379D}"/>
               </a:ext>
             </a:extLst>
           </p:cNvPr>
@@ -7674,10 +7955,10 @@
       </p:sp>
       <p:sp>
         <p:nvSpPr>
-          <p:cNvPr id="12" name="TextBox 11">
-            <a:extLst>
-              <a:ext uri="{FF2B5EF4-FFF2-40B4-BE49-F238E27FC236}">
-                <a16:creationId xmlns:a16="http://schemas.microsoft.com/office/drawing/2014/main" id="{A831A680-6291-52B3-9517-2C1E3C29C97A}"/>
+          <p:cNvPr id="15" name="TextBox 14">
+            <a:extLst>
+              <a:ext uri="{FF2B5EF4-FFF2-40B4-BE49-F238E27FC236}">
+                <a16:creationId xmlns:a16="http://schemas.microsoft.com/office/drawing/2014/main" id="{EF2A1BE2-7D0D-C505-F79B-558E759AE041}"/>
               </a:ext>
             </a:extLst>
           </p:cNvPr>
@@ -7686,55 +7967,8 @@
         </p:nvSpPr>
         <p:spPr>
           <a:xfrm>
-            <a:off x="4549266" y="2328084"/>
-            <a:ext cx="2621518" cy="661720"/>
-          </a:xfrm>
-          <a:prstGeom prst="rect">
-            <a:avLst/>
-          </a:prstGeom>
-          <a:noFill/>
-        </p:spPr>
-        <p:txBody>
-          <a:bodyPr wrap="square" rtlCol="0">
-            <a:spAutoFit/>
-          </a:bodyPr>
-          <a:lstStyle/>
-          <a:p>
-            <a:r>
-              <a:rPr lang="en-IN" sz="1300" dirty="0"/>
-              <a:t>AutoTest_CaplStudio.py (MAIN GUI)</a:t>
-            </a:r>
-          </a:p>
-          <a:p>
-            <a:r>
-              <a:rPr lang="en-IN" sz="1200" dirty="0"/>
-              <a:t>  |CAPL_Generator.py</a:t>
-            </a:r>
-          </a:p>
-          <a:p>
-            <a:r>
-              <a:rPr lang="en-IN" sz="1200" dirty="0"/>
-              <a:t>  | TestSpec_Generator.py</a:t>
-            </a:r>
-          </a:p>
-        </p:txBody>
-      </p:sp>
-      <p:sp>
-        <p:nvSpPr>
-          <p:cNvPr id="16" name="TextBox 15">
-            <a:extLst>
-              <a:ext uri="{FF2B5EF4-FFF2-40B4-BE49-F238E27FC236}">
-                <a16:creationId xmlns:a16="http://schemas.microsoft.com/office/drawing/2014/main" id="{D29C91D7-772E-86B6-921A-D492DFEE9A95}"/>
-              </a:ext>
-            </a:extLst>
-          </p:cNvPr>
-          <p:cNvSpPr txBox="1"/>
-          <p:nvPr/>
-        </p:nvSpPr>
-        <p:spPr>
-          <a:xfrm>
-            <a:off x="646744" y="2120335"/>
-            <a:ext cx="1748574" cy="1077218"/>
+            <a:off x="1138083" y="1410355"/>
+            <a:ext cx="1822656" cy="369332"/>
           </a:xfrm>
           <a:prstGeom prst="rect">
             <a:avLst/>
@@ -7753,140 +7987,31 @@
           <a:lstStyle/>
           <a:p>
             <a:r>
-              <a:rPr lang="en-IN" sz="1600" dirty="0"/>
-              <a:t>System Prompts (Bootloader, UDS, Vehicle Communication,…)</a:t>
-            </a:r>
-          </a:p>
-        </p:txBody>
-      </p:sp>
-      <p:sp>
-        <p:nvSpPr>
-          <p:cNvPr id="19" name="TextBox 18">
-            <a:extLst>
-              <a:ext uri="{FF2B5EF4-FFF2-40B4-BE49-F238E27FC236}">
-                <a16:creationId xmlns:a16="http://schemas.microsoft.com/office/drawing/2014/main" id="{F2676850-218C-683D-98F6-DCDBD9A01E90}"/>
-              </a:ext>
-            </a:extLst>
-          </p:cNvPr>
-          <p:cNvSpPr txBox="1"/>
-          <p:nvPr/>
-        </p:nvSpPr>
-        <p:spPr>
-          <a:xfrm>
-            <a:off x="664796" y="1637861"/>
-            <a:ext cx="1656960" cy="338554"/>
-          </a:xfrm>
-          <a:prstGeom prst="rect">
-            <a:avLst/>
-          </a:prstGeom>
-          <a:noFill/>
-          <a:ln>
-            <a:solidFill>
-              <a:schemeClr val="tx1"/>
-            </a:solidFill>
-          </a:ln>
-        </p:spPr>
-        <p:txBody>
-          <a:bodyPr wrap="square" rtlCol="0">
-            <a:spAutoFit/>
-          </a:bodyPr>
-          <a:lstStyle/>
-          <a:p>
-            <a:r>
-              <a:rPr lang="en-IN" sz="1600" dirty="0"/>
+              <a:rPr lang="en-IN" dirty="0"/>
               <a:t>SW Requirement</a:t>
-            </a:r>
-          </a:p>
-        </p:txBody>
-      </p:sp>
-      <p:sp>
-        <p:nvSpPr>
-          <p:cNvPr id="21" name="TextBox 20">
-            <a:extLst>
-              <a:ext uri="{FF2B5EF4-FFF2-40B4-BE49-F238E27FC236}">
-                <a16:creationId xmlns:a16="http://schemas.microsoft.com/office/drawing/2014/main" id="{A1742BC4-907F-2054-1FFB-8E2E6BDB5BB2}"/>
-              </a:ext>
-            </a:extLst>
-          </p:cNvPr>
-          <p:cNvSpPr txBox="1"/>
-          <p:nvPr/>
-        </p:nvSpPr>
-        <p:spPr>
-          <a:xfrm>
-            <a:off x="2528121" y="1540870"/>
-            <a:ext cx="1859355" cy="246221"/>
-          </a:xfrm>
-          <a:prstGeom prst="rect">
-            <a:avLst/>
-          </a:prstGeom>
-          <a:noFill/>
-        </p:spPr>
-        <p:txBody>
-          <a:bodyPr wrap="square" rtlCol="0">
-            <a:spAutoFit/>
-          </a:bodyPr>
-          <a:lstStyle/>
-          <a:p>
-            <a:r>
-              <a:rPr lang="en-IN" sz="1000" dirty="0"/>
-              <a:t>Test Spec Generation [Input - 1]</a:t>
-            </a:r>
-          </a:p>
-        </p:txBody>
-      </p:sp>
-      <p:sp>
-        <p:nvSpPr>
-          <p:cNvPr id="22" name="TextBox 21">
-            <a:extLst>
-              <a:ext uri="{FF2B5EF4-FFF2-40B4-BE49-F238E27FC236}">
-                <a16:creationId xmlns:a16="http://schemas.microsoft.com/office/drawing/2014/main" id="{0605A3D9-D2A7-AA9C-CBFE-491EE774D72C}"/>
-              </a:ext>
-            </a:extLst>
-          </p:cNvPr>
-          <p:cNvSpPr txBox="1"/>
-          <p:nvPr/>
-        </p:nvSpPr>
-        <p:spPr>
-          <a:xfrm>
-            <a:off x="2510162" y="2284112"/>
-            <a:ext cx="1827400" cy="246221"/>
-          </a:xfrm>
-          <a:prstGeom prst="rect">
-            <a:avLst/>
-          </a:prstGeom>
-          <a:noFill/>
-        </p:spPr>
-        <p:txBody>
-          <a:bodyPr wrap="square" rtlCol="0">
-            <a:spAutoFit/>
-          </a:bodyPr>
-          <a:lstStyle/>
-          <a:p>
-            <a:r>
-              <a:rPr lang="en-IN" sz="1000" dirty="0"/>
-              <a:t>Test Spec Generation [Input - 2]</a:t>
             </a:r>
           </a:p>
         </p:txBody>
       </p:sp>
       <p:cxnSp>
         <p:nvCxnSpPr>
-          <p:cNvPr id="24" name="Straight Arrow Connector 23">
-            <a:extLst>
-              <a:ext uri="{FF2B5EF4-FFF2-40B4-BE49-F238E27FC236}">
-                <a16:creationId xmlns:a16="http://schemas.microsoft.com/office/drawing/2014/main" id="{437A20C4-D536-E36E-E6B5-10342B77E84D}"/>
+          <p:cNvPr id="16" name="Straight Arrow Connector 15">
+            <a:extLst>
+              <a:ext uri="{FF2B5EF4-FFF2-40B4-BE49-F238E27FC236}">
+                <a16:creationId xmlns:a16="http://schemas.microsoft.com/office/drawing/2014/main" id="{467D6FE0-D706-925F-B1AA-888F143EFEE3}"/>
               </a:ext>
             </a:extLst>
           </p:cNvPr>
           <p:cNvCxnSpPr>
-            <a:stCxn id="19" idx="3"/>
+            <a:cxnSpLocks/>
+            <a:stCxn id="15" idx="3"/>
           </p:cNvCxnSpPr>
           <p:nvPr/>
         </p:nvCxnSpPr>
         <p:spPr>
           <a:xfrm>
-            <a:off x="2321756" y="1807138"/>
-            <a:ext cx="2166669" cy="11830"/>
+            <a:off x="2960739" y="1595021"/>
+            <a:ext cx="1978740" cy="0"/>
           </a:xfrm>
           <a:prstGeom prst="straightConnector1">
             <a:avLst/>
@@ -7910,51 +8035,45 @@
           </a:fontRef>
         </p:style>
       </p:cxnSp>
-      <p:cxnSp>
-        <p:nvCxnSpPr>
-          <p:cNvPr id="26" name="Straight Arrow Connector 25">
-            <a:extLst>
-              <a:ext uri="{FF2B5EF4-FFF2-40B4-BE49-F238E27FC236}">
-                <a16:creationId xmlns:a16="http://schemas.microsoft.com/office/drawing/2014/main" id="{CD3E1AEE-0B38-C527-0D44-187F28867510}"/>
-              </a:ext>
-            </a:extLst>
-          </p:cNvPr>
-          <p:cNvCxnSpPr>
-            <a:stCxn id="16" idx="3"/>
-          </p:cNvCxnSpPr>
-          <p:nvPr/>
-        </p:nvCxnSpPr>
-        <p:spPr>
-          <a:xfrm flipV="1">
-            <a:off x="2395318" y="2654710"/>
-            <a:ext cx="2093107" cy="4234"/>
-          </a:xfrm>
-          <a:prstGeom prst="straightConnector1">
-            <a:avLst/>
-          </a:prstGeom>
-          <a:ln>
-            <a:tailEnd type="triangle"/>
-          </a:ln>
-        </p:spPr>
-        <p:style>
-          <a:lnRef idx="1">
-            <a:schemeClr val="dk1"/>
-          </a:lnRef>
-          <a:fillRef idx="0">
-            <a:schemeClr val="dk1"/>
-          </a:fillRef>
-          <a:effectRef idx="0">
-            <a:schemeClr val="dk1"/>
-          </a:effectRef>
-          <a:fontRef idx="minor">
-            <a:schemeClr val="tx1"/>
-          </a:fontRef>
-        </p:style>
-      </p:cxnSp>
+      <p:sp>
+        <p:nvSpPr>
+          <p:cNvPr id="19" name="TextBox 18">
+            <a:extLst>
+              <a:ext uri="{FF2B5EF4-FFF2-40B4-BE49-F238E27FC236}">
+                <a16:creationId xmlns:a16="http://schemas.microsoft.com/office/drawing/2014/main" id="{A1585F9C-EF50-ED21-9E25-A89504DFDB44}"/>
+              </a:ext>
+            </a:extLst>
+          </p:cNvPr>
+          <p:cNvSpPr txBox="1"/>
+          <p:nvPr/>
+        </p:nvSpPr>
+        <p:spPr>
+          <a:xfrm>
+            <a:off x="3118974" y="1299600"/>
+            <a:ext cx="1923433" cy="246221"/>
+          </a:xfrm>
+          <a:prstGeom prst="rect">
+            <a:avLst/>
+          </a:prstGeom>
+          <a:noFill/>
+        </p:spPr>
+        <p:txBody>
+          <a:bodyPr wrap="square" rtlCol="0">
+            <a:spAutoFit/>
+          </a:bodyPr>
+          <a:lstStyle/>
+          <a:p>
+            <a:r>
+              <a:rPr lang="en-IN" sz="1000" dirty="0"/>
+              <a:t>Test Spec Generation</a:t>
+            </a:r>
+          </a:p>
+        </p:txBody>
+      </p:sp>
     </p:spTree>
     <p:extLst>
       <p:ext uri="{BB962C8B-B14F-4D97-AF65-F5344CB8AC3E}">
-        <p14:creationId xmlns:p14="http://schemas.microsoft.com/office/powerpoint/2010/main" val="88641686"/>
+        <p14:creationId xmlns:p14="http://schemas.microsoft.com/office/powerpoint/2010/main" val="1418751361"/>
       </p:ext>
     </p:extLst>
   </p:cSld>
